--- a/project_51_energy_consumption_forecasting/presentations/project_presentation.pptx
+++ b/project_51_energy_consumption_forecasting/presentations/project_presentation.pptx
@@ -13,6 +13,13 @@
     <p:sldId id="261" r:id="rId12"/>
     <p:sldId id="262" r:id="rId13"/>
     <p:sldId id="263" r:id="rId14"/>
+    <p:sldId id="264" r:id="rId15"/>
+    <p:sldId id="265" r:id="rId16"/>
+    <p:sldId id="266" r:id="rId17"/>
+    <p:sldId id="267" r:id="rId18"/>
+    <p:sldId id="268" r:id="rId19"/>
+    <p:sldId id="269" r:id="rId20"/>
+    <p:sldId id="270" r:id="rId21"/>
   </p:sldIdLst>
   <p:sldSz cx="12191695" cy="6858000" type="screen4x3"/>
   <p:notesSz cx="6858000" cy="9144000"/>
@@ -3097,23 +3104,174 @@
       <p:grpSpPr/>
       <p:sp>
         <p:nvSpPr>
-          <p:cNvPr id="2" name="Rectangle 1"/>
+          <p:cNvPr id="2" name="TextBox 1"/>
+          <p:cNvSpPr txBox="1"/>
+          <p:nvPr/>
+        </p:nvSpPr>
+        <p:spPr>
+          <a:xfrm>
+            <a:off x="914400" y="1645920"/>
+            <a:ext cx="10362895" cy="3474720"/>
+          </a:xfrm>
+          <a:prstGeom prst="rect">
+            <a:avLst/>
+          </a:prstGeom>
+          <a:noFill/>
+        </p:spPr>
+        <p:txBody>
+          <a:bodyPr wrap="square">
+            <a:spAutoFit/>
+          </a:bodyPr>
+          <a:lstStyle/>
+          <a:p>
+            <a:r>
+              <a:rPr b="1" sz="1200">
+                <a:solidFill>
+                  <a:srgbClr val="D97706"/>
+                </a:solidFill>
+              </a:rPr>
+              <a:t>ENGINEERING CAPSTONE PORTFOLIO • PROJECT-051</a:t>
+            </a:r>
+          </a:p>
+          <a:p>
+            <a:pPr>
+              <a:spcBef>
+                <a:spcPts val="1000"/>
+              </a:spcBef>
+            </a:pPr>
+            <a:r>
+              <a:rPr b="1" sz="3200">
+                <a:solidFill>
+                  <a:srgbClr val="0F172A"/>
+                </a:solidFill>
+              </a:rPr>
+              <a:t>Smart Energy Consumption Forecasting &amp;
+Dynamic Peak Shaving Platform</a:t>
+            </a:r>
+          </a:p>
+          <a:p>
+            <a:pPr>
+              <a:spcBef>
+                <a:spcPts val="1200"/>
+              </a:spcBef>
+            </a:pPr>
+            <a:r>
+              <a:rPr sz="1400">
+                <a:solidFill>
+                  <a:srgbClr val="64748B"/>
+                </a:solidFill>
+              </a:rPr>
+              <a:t>Dual PyTorch Engines (Bi-LSTM Forecaster &amp; Grid Carbon Regressor), 6,000 Energy Records, SQLite WAL, SHA-256 Audit Ledger &amp; Port 5051 Microservice</a:t>
+            </a:r>
+          </a:p>
+        </p:txBody>
+      </p:sp>
+    </p:spTree>
+  </p:cSld>
+  <p:clrMapOvr>
+    <a:masterClrMapping/>
+  </p:clrMapOvr>
+</p:sld>
+</file>
+
+<file path=ppt/slides/slide10.xml><?xml version="1.0" encoding="utf-8"?>
+<p:sld xmlns:a="http://schemas.openxmlformats.org/drawingml/2006/main" xmlns:p="http://schemas.openxmlformats.org/presentationml/2006/main" xmlns:r="http://schemas.openxmlformats.org/officeDocument/2006/relationships">
+  <p:cSld>
+    <p:spTree>
+      <p:nvGrpSpPr>
+        <p:cNvPr id="1" name=""/>
+        <p:cNvGrpSpPr/>
+        <p:nvPr/>
+      </p:nvGrpSpPr>
+      <p:grpSpPr/>
+      <p:sp>
+        <p:nvSpPr>
+          <p:cNvPr id="2" name="TextBox 1"/>
+          <p:cNvSpPr txBox="1"/>
+          <p:nvPr/>
+        </p:nvSpPr>
+        <p:spPr>
+          <a:xfrm>
+            <a:off x="731520" y="365760"/>
+            <a:ext cx="10728655" cy="822960"/>
+          </a:xfrm>
+          <a:prstGeom prst="rect">
+            <a:avLst/>
+          </a:prstGeom>
+          <a:noFill/>
+        </p:spPr>
+        <p:txBody>
+          <a:bodyPr wrap="square" lIns="0" tIns="0" rIns="0" bIns="0">
+            <a:spAutoFit/>
+          </a:bodyPr>
+          <a:lstStyle/>
+          <a:p>
+            <a:r>
+              <a:rPr b="1" sz="1000">
+                <a:solidFill>
+                  <a:srgbClr val="D97706"/>
+                </a:solidFill>
+              </a:rPr>
+              <a:t>CASE STUDY 2 • PROJECT-051</a:t>
+            </a:r>
+          </a:p>
+          <a:p>
+            <a:r>
+              <a:rPr b="1" sz="2000">
+                <a:solidFill>
+                  <a:srgbClr val="0F172A"/>
+                </a:solidFill>
+              </a:rPr>
+              <a:t>Industrial Plant Shift: Automotive Stamping Assembly 4</a:t>
+            </a:r>
+          </a:p>
+        </p:txBody>
+      </p:sp>
+      <p:pic>
+        <p:nvPicPr>
+          <p:cNvPr id="3" name="Picture 2" descr="04_industrial_plant_load_shift.png"/>
+          <p:cNvPicPr>
+            <a:picLocks noChangeAspect="1"/>
+          </p:cNvPicPr>
+          <p:nvPr/>
+        </p:nvPicPr>
+        <p:blipFill>
+          <a:blip r:embed="rId2"/>
+          <a:stretch>
+            <a:fillRect/>
+          </a:stretch>
+        </p:blipFill>
+        <p:spPr>
+          <a:xfrm>
+            <a:off x="731520" y="1371600"/>
+            <a:ext cx="6858000" cy="4846320"/>
+          </a:xfrm>
+          <a:prstGeom prst="rect">
+            <a:avLst/>
+          </a:prstGeom>
+        </p:spPr>
+      </p:pic>
+      <p:sp>
+        <p:nvSpPr>
+          <p:cNvPr id="4" name="Rectangle 3"/>
           <p:cNvSpPr/>
           <p:nvPr/>
         </p:nvSpPr>
         <p:spPr>
           <a:xfrm>
-            <a:off x="0" y="0"/>
-            <a:ext cx="12191695" cy="6858000"/>
+            <a:off x="7863840" y="1371600"/>
+            <a:ext cx="3566160" cy="4846320"/>
           </a:xfrm>
           <a:prstGeom prst="rect">
             <a:avLst/>
           </a:prstGeom>
           <a:solidFill>
-            <a:srgbClr val="0F172A"/>
+            <a:srgbClr val="FFFFFF"/>
           </a:solidFill>
-          <a:ln>
-            <a:noFill/>
+          <a:ln w="12700">
+            <a:solidFill>
+              <a:srgbClr val="E2E8F0"/>
+            </a:solidFill>
           </a:ln>
         </p:spPr>
         <p:style>
@@ -3140,14 +3298,14 @@
       </p:sp>
       <p:sp>
         <p:nvSpPr>
-          <p:cNvPr id="3" name="TextBox 2"/>
+          <p:cNvPr id="5" name="TextBox 4"/>
           <p:cNvSpPr txBox="1"/>
           <p:nvPr/>
         </p:nvSpPr>
         <p:spPr>
           <a:xfrm>
-            <a:off x="1097280" y="1645920"/>
-            <a:ext cx="10058400" cy="3474720"/>
+            <a:off x="8046720" y="1554480"/>
+            <a:ext cx="3200400" cy="4480560"/>
           </a:xfrm>
           <a:prstGeom prst="rect">
             <a:avLst/>
@@ -3155,50 +3313,1754 @@
           <a:noFill/>
         </p:spPr>
         <p:txBody>
-          <a:bodyPr wrap="square">
+          <a:bodyPr wrap="square" lIns="0" tIns="0" rIns="0" bIns="0">
             <a:spAutoFit/>
           </a:bodyPr>
           <a:lstStyle/>
           <a:p>
-            <a:pPr>
-              <a:defRPr sz="1400" b="1">
-                <a:solidFill>
-                  <a:srgbClr val="38BDF8"/>
-                </a:solidFill>
-              </a:defRPr>
-            </a:pPr>
-            <a:r>
-              <a:t>PROJECT 51 OF 55  •  RESEARCH &amp; IMPLEMENTATION DECK</a:t>
-            </a:r>
-          </a:p>
-          <a:p>
-            <a:pPr>
-              <a:spcBef>
-                <a:spcPts val="1400"/>
-              </a:spcBef>
-              <a:defRPr sz="3200" b="1">
-                <a:solidFill>
-                  <a:srgbClr val="FFFFFF"/>
-                </a:solidFill>
-              </a:defRPr>
-            </a:pPr>
-            <a:r>
-              <a:t>Smart Energy Consumption Forecasting and Optimization Using Machine Learning</a:t>
-            </a:r>
-          </a:p>
-          <a:p>
-            <a:pPr>
-              <a:spcBef>
-                <a:spcPts val="1200"/>
-              </a:spcBef>
-              <a:defRPr sz="1600">
-                <a:solidFill>
-                  <a:srgbClr val="CBD5E1"/>
-                </a:solidFill>
-              </a:defRPr>
-            </a:pPr>
-            <a:r>
-              <a:t>Enterprise-Grade AI Architecture, Machine Learning Pipeline &amp; Deployment Framework</a:t>
+            <a:r>
+              <a:rPr b="1" sz="1300">
+                <a:solidFill>
+                  <a:srgbClr val="D97706"/>
+                </a:solidFill>
+              </a:rPr>
+              <a:t>Heavy Motor Shifting</a:t>
+            </a:r>
+          </a:p>
+          <a:p>
+            <a:pPr>
+              <a:spcBef>
+                <a:spcPts val="400"/>
+              </a:spcBef>
+            </a:pPr>
+            <a:r>
+              <a:rPr sz="1000">
+                <a:solidFill>
+                  <a:srgbClr val="1E293B"/>
+                </a:solidFill>
+              </a:rPr>
+              <a:t>• Base Load: 850 kW, Heavy industrial manufacturing 3-phase machinery.</a:t>
+            </a:r>
+          </a:p>
+          <a:p>
+            <a:pPr>
+              <a:spcBef>
+                <a:spcPts val="400"/>
+              </a:spcBef>
+            </a:pPr>
+            <a:r>
+              <a:rPr sz="1000">
+                <a:solidFill>
+                  <a:srgbClr val="1E293B"/>
+                </a:solidFill>
+              </a:rPr>
+              <a:t>• Forecast Peak: 1,120.0 kW -&gt; Shaved to 885.0 kW (21.0% reduction).</a:t>
+            </a:r>
+          </a:p>
+          <a:p>
+            <a:pPr>
+              <a:spcBef>
+                <a:spcPts val="400"/>
+              </a:spcBef>
+            </a:pPr>
+            <a:r>
+              <a:rPr sz="1000">
+                <a:solidFill>
+                  <a:srgbClr val="1E293B"/>
+                </a:solidFill>
+              </a:rPr>
+              <a:t>• Daily Cost Savings: $285.40 ($104,170 annual savings).</a:t>
+            </a:r>
+          </a:p>
+          <a:p>
+            <a:pPr>
+              <a:spcBef>
+                <a:spcPts val="400"/>
+              </a:spcBef>
+            </a:pPr>
+            <a:r>
+              <a:rPr sz="1000">
+                <a:solidFill>
+                  <a:srgbClr val="1E293B"/>
+                </a:solidFill>
+              </a:rPr>
+              <a:t>• CO2 Avoided: 265.0 kg/day through peak turbine avoidance.</a:t>
+            </a:r>
+          </a:p>
+          <a:p>
+            <a:pPr>
+              <a:spcBef>
+                <a:spcPts val="400"/>
+              </a:spcBef>
+            </a:pPr>
+            <a:r>
+              <a:rPr sz="1000">
+                <a:solidFill>
+                  <a:srgbClr val="1E293B"/>
+                </a:solidFill>
+              </a:rPr>
+              <a:t>• Actions: Shift secondary furnace load to 22:00-04:00 night shift.</a:t>
+            </a:r>
+          </a:p>
+          <a:p>
+            <a:pPr>
+              <a:spcBef>
+                <a:spcPts val="400"/>
+              </a:spcBef>
+            </a:pPr>
+            <a:r>
+              <a:rPr sz="1000">
+                <a:solidFill>
+                  <a:srgbClr val="1E293B"/>
+                </a:solidFill>
+              </a:rPr>
+              <a:t>• Grid Stress Index moderated from 82 to 51 points.</a:t>
+            </a:r>
+          </a:p>
+        </p:txBody>
+      </p:sp>
+    </p:spTree>
+  </p:cSld>
+  <p:clrMapOvr>
+    <a:masterClrMapping/>
+  </p:clrMapOvr>
+</p:sld>
+</file>
+
+<file path=ppt/slides/slide11.xml><?xml version="1.0" encoding="utf-8"?>
+<p:sld xmlns:a="http://schemas.openxmlformats.org/drawingml/2006/main" xmlns:p="http://schemas.openxmlformats.org/presentationml/2006/main" xmlns:r="http://schemas.openxmlformats.org/officeDocument/2006/relationships">
+  <p:cSld>
+    <p:spTree>
+      <p:nvGrpSpPr>
+        <p:cNvPr id="1" name=""/>
+        <p:cNvGrpSpPr/>
+        <p:nvPr/>
+      </p:nvGrpSpPr>
+      <p:grpSpPr/>
+      <p:sp>
+        <p:nvSpPr>
+          <p:cNvPr id="2" name="TextBox 1"/>
+          <p:cNvSpPr txBox="1"/>
+          <p:nvPr/>
+        </p:nvSpPr>
+        <p:spPr>
+          <a:xfrm>
+            <a:off x="731520" y="365760"/>
+            <a:ext cx="10728655" cy="822960"/>
+          </a:xfrm>
+          <a:prstGeom prst="rect">
+            <a:avLst/>
+          </a:prstGeom>
+          <a:noFill/>
+        </p:spPr>
+        <p:txBody>
+          <a:bodyPr wrap="square" lIns="0" tIns="0" rIns="0" bIns="0">
+            <a:spAutoFit/>
+          </a:bodyPr>
+          <a:lstStyle/>
+          <a:p>
+            <a:r>
+              <a:rPr b="1" sz="1000">
+                <a:solidFill>
+                  <a:srgbClr val="D97706"/>
+                </a:solidFill>
+              </a:rPr>
+              <a:t>CASE STUDY 3 • PROJECT-051</a:t>
+            </a:r>
+          </a:p>
+          <a:p>
+            <a:r>
+              <a:rPr b="1" sz="2000">
+                <a:solidFill>
+                  <a:srgbClr val="0F172A"/>
+                </a:solidFill>
+              </a:rPr>
+              <a:t>Hyperscale Data Center: Cloud Facility DC-2</a:t>
+            </a:r>
+          </a:p>
+        </p:txBody>
+      </p:sp>
+      <p:pic>
+        <p:nvPicPr>
+          <p:cNvPr id="3" name="Picture 2" descr="05_hyperscale_datacenter_dispatch.png"/>
+          <p:cNvPicPr>
+            <a:picLocks noChangeAspect="1"/>
+          </p:cNvPicPr>
+          <p:nvPr/>
+        </p:nvPicPr>
+        <p:blipFill>
+          <a:blip r:embed="rId2"/>
+          <a:stretch>
+            <a:fillRect/>
+          </a:stretch>
+        </p:blipFill>
+        <p:spPr>
+          <a:xfrm>
+            <a:off x="731520" y="1371600"/>
+            <a:ext cx="6858000" cy="4846320"/>
+          </a:xfrm>
+          <a:prstGeom prst="rect">
+            <a:avLst/>
+          </a:prstGeom>
+        </p:spPr>
+      </p:pic>
+      <p:sp>
+        <p:nvSpPr>
+          <p:cNvPr id="4" name="Rectangle 3"/>
+          <p:cNvSpPr/>
+          <p:nvPr/>
+        </p:nvSpPr>
+        <p:spPr>
+          <a:xfrm>
+            <a:off x="7863840" y="1371600"/>
+            <a:ext cx="3566160" cy="4846320"/>
+          </a:xfrm>
+          <a:prstGeom prst="rect">
+            <a:avLst/>
+          </a:prstGeom>
+          <a:solidFill>
+            <a:srgbClr val="FFFFFF"/>
+          </a:solidFill>
+          <a:ln w="12700">
+            <a:solidFill>
+              <a:srgbClr val="E2E8F0"/>
+            </a:solidFill>
+          </a:ln>
+        </p:spPr>
+        <p:style>
+          <a:lnRef idx="1">
+            <a:schemeClr val="accent1"/>
+          </a:lnRef>
+          <a:fillRef idx="3">
+            <a:schemeClr val="accent1"/>
+          </a:fillRef>
+          <a:effectRef idx="2">
+            <a:schemeClr val="accent1"/>
+          </a:effectRef>
+          <a:fontRef idx="minor">
+            <a:schemeClr val="lt1"/>
+          </a:fontRef>
+        </p:style>
+        <p:txBody>
+          <a:bodyPr rtlCol="0" anchor="ctr"/>
+          <a:lstStyle/>
+          <a:p>
+            <a:pPr algn="ctr"/>
+          </a:p>
+        </p:txBody>
+      </p:sp>
+      <p:sp>
+        <p:nvSpPr>
+          <p:cNvPr id="5" name="TextBox 4"/>
+          <p:cNvSpPr txBox="1"/>
+          <p:nvPr/>
+        </p:nvSpPr>
+        <p:spPr>
+          <a:xfrm>
+            <a:off x="8046720" y="1554480"/>
+            <a:ext cx="3200400" cy="4480560"/>
+          </a:xfrm>
+          <a:prstGeom prst="rect">
+            <a:avLst/>
+          </a:prstGeom>
+          <a:noFill/>
+        </p:spPr>
+        <p:txBody>
+          <a:bodyPr wrap="square" lIns="0" tIns="0" rIns="0" bIns="0">
+            <a:spAutoFit/>
+          </a:bodyPr>
+          <a:lstStyle/>
+          <a:p>
+            <a:r>
+              <a:rPr b="1" sz="1300">
+                <a:solidFill>
+                  <a:srgbClr val="D97706"/>
+                </a:solidFill>
+              </a:rPr>
+              <a:t>Continuous IT Load</a:t>
+            </a:r>
+          </a:p>
+          <a:p>
+            <a:pPr>
+              <a:spcBef>
+                <a:spcPts val="400"/>
+              </a:spcBef>
+            </a:pPr>
+            <a:r>
+              <a:rPr sz="1000">
+                <a:solidFill>
+                  <a:srgbClr val="1E293B"/>
+                </a:solidFill>
+              </a:rPr>
+              <a:t>• Base Load: 1,200 kW, High thermal density server racks.</a:t>
+            </a:r>
+          </a:p>
+          <a:p>
+            <a:pPr>
+              <a:spcBef>
+                <a:spcPts val="400"/>
+              </a:spcBef>
+            </a:pPr>
+            <a:r>
+              <a:rPr sz="1000">
+                <a:solidFill>
+                  <a:srgbClr val="1E293B"/>
+                </a:solidFill>
+              </a:rPr>
+              <a:t>• Forecast Peak: 1,480.0 kW -&gt; Shaved to 1,215.0 kW (17.9% reduction).</a:t>
+            </a:r>
+          </a:p>
+          <a:p>
+            <a:pPr>
+              <a:spcBef>
+                <a:spcPts val="400"/>
+              </a:spcBef>
+            </a:pPr>
+            <a:r>
+              <a:rPr sz="1000">
+                <a:solidFill>
+                  <a:srgbClr val="1E293B"/>
+                </a:solidFill>
+              </a:rPr>
+              <a:t>• Daily Cost Savings: $310.20 with chilled water thermal storage buffer.</a:t>
+            </a:r>
+          </a:p>
+          <a:p>
+            <a:pPr>
+              <a:spcBef>
+                <a:spcPts val="400"/>
+              </a:spcBef>
+            </a:pPr>
+            <a:r>
+              <a:rPr sz="1000">
+                <a:solidFill>
+                  <a:srgbClr val="1E293B"/>
+                </a:solidFill>
+              </a:rPr>
+              <a:t>• Actions: Pre-chill thermal water loop 01:00-05:00; Run economizer.</a:t>
+            </a:r>
+          </a:p>
+          <a:p>
+            <a:pPr>
+              <a:spcBef>
+                <a:spcPts val="400"/>
+              </a:spcBef>
+            </a:pPr>
+            <a:r>
+              <a:rPr sz="1000">
+                <a:solidFill>
+                  <a:srgbClr val="1E293B"/>
+                </a:solidFill>
+              </a:rPr>
+              <a:t>• Continuous 24/7 reliability maintained without server throttling.</a:t>
+            </a:r>
+          </a:p>
+          <a:p>
+            <a:pPr>
+              <a:spcBef>
+                <a:spcPts val="400"/>
+              </a:spcBef>
+            </a:pPr>
+            <a:r>
+              <a:rPr sz="1000">
+                <a:solidFill>
+                  <a:srgbClr val="1E293B"/>
+                </a:solidFill>
+              </a:rPr>
+              <a:t>• Audited with cryptographic block chaining.</a:t>
+            </a:r>
+          </a:p>
+        </p:txBody>
+      </p:sp>
+    </p:spTree>
+  </p:cSld>
+  <p:clrMapOvr>
+    <a:masterClrMapping/>
+  </p:clrMapOvr>
+</p:sld>
+</file>
+
+<file path=ppt/slides/slide12.xml><?xml version="1.0" encoding="utf-8"?>
+<p:sld xmlns:a="http://schemas.openxmlformats.org/drawingml/2006/main" xmlns:p="http://schemas.openxmlformats.org/presentationml/2006/main" xmlns:r="http://schemas.openxmlformats.org/officeDocument/2006/relationships">
+  <p:cSld>
+    <p:spTree>
+      <p:nvGrpSpPr>
+        <p:cNvPr id="1" name=""/>
+        <p:cNvGrpSpPr/>
+        <p:nvPr/>
+      </p:nvGrpSpPr>
+      <p:grpSpPr/>
+      <p:sp>
+        <p:nvSpPr>
+          <p:cNvPr id="2" name="TextBox 1"/>
+          <p:cNvSpPr txBox="1"/>
+          <p:nvPr/>
+        </p:nvSpPr>
+        <p:spPr>
+          <a:xfrm>
+            <a:off x="731520" y="365760"/>
+            <a:ext cx="10728655" cy="822960"/>
+          </a:xfrm>
+          <a:prstGeom prst="rect">
+            <a:avLst/>
+          </a:prstGeom>
+          <a:noFill/>
+        </p:spPr>
+        <p:txBody>
+          <a:bodyPr wrap="square" lIns="0" tIns="0" rIns="0" bIns="0">
+            <a:spAutoFit/>
+          </a:bodyPr>
+          <a:lstStyle/>
+          <a:p>
+            <a:r>
+              <a:rPr b="1" sz="1000">
+                <a:solidFill>
+                  <a:srgbClr val="D97706"/>
+                </a:solidFill>
+              </a:rPr>
+              <a:t>CASE STUDY 4 • PROJECT-051</a:t>
+            </a:r>
+          </a:p>
+          <a:p>
+            <a:r>
+              <a:rPr b="1" sz="2000">
+                <a:solidFill>
+                  <a:srgbClr val="0F172A"/>
+                </a:solidFill>
+              </a:rPr>
+              <a:t>Healthcare Complex: Metro General Hospital Resilience</a:t>
+            </a:r>
+          </a:p>
+        </p:txBody>
+      </p:sp>
+      <p:pic>
+        <p:nvPicPr>
+          <p:cNvPr id="3" name="Picture 2" descr="06_metro_hospital_critical_resilience.png"/>
+          <p:cNvPicPr>
+            <a:picLocks noChangeAspect="1"/>
+          </p:cNvPicPr>
+          <p:nvPr/>
+        </p:nvPicPr>
+        <p:blipFill>
+          <a:blip r:embed="rId2"/>
+          <a:stretch>
+            <a:fillRect/>
+          </a:stretch>
+        </p:blipFill>
+        <p:spPr>
+          <a:xfrm>
+            <a:off x="731520" y="1371600"/>
+            <a:ext cx="6858000" cy="4846320"/>
+          </a:xfrm>
+          <a:prstGeom prst="rect">
+            <a:avLst/>
+          </a:prstGeom>
+        </p:spPr>
+      </p:pic>
+      <p:sp>
+        <p:nvSpPr>
+          <p:cNvPr id="4" name="Rectangle 3"/>
+          <p:cNvSpPr/>
+          <p:nvPr/>
+        </p:nvSpPr>
+        <p:spPr>
+          <a:xfrm>
+            <a:off x="7863840" y="1371600"/>
+            <a:ext cx="3566160" cy="4846320"/>
+          </a:xfrm>
+          <a:prstGeom prst="rect">
+            <a:avLst/>
+          </a:prstGeom>
+          <a:solidFill>
+            <a:srgbClr val="FFFFFF"/>
+          </a:solidFill>
+          <a:ln w="12700">
+            <a:solidFill>
+              <a:srgbClr val="E2E8F0"/>
+            </a:solidFill>
+          </a:ln>
+        </p:spPr>
+        <p:style>
+          <a:lnRef idx="1">
+            <a:schemeClr val="accent1"/>
+          </a:lnRef>
+          <a:fillRef idx="3">
+            <a:schemeClr val="accent1"/>
+          </a:fillRef>
+          <a:effectRef idx="2">
+            <a:schemeClr val="accent1"/>
+          </a:effectRef>
+          <a:fontRef idx="minor">
+            <a:schemeClr val="lt1"/>
+          </a:fontRef>
+        </p:style>
+        <p:txBody>
+          <a:bodyPr rtlCol="0" anchor="ctr"/>
+          <a:lstStyle/>
+          <a:p>
+            <a:pPr algn="ctr"/>
+          </a:p>
+        </p:txBody>
+      </p:sp>
+      <p:sp>
+        <p:nvSpPr>
+          <p:cNvPr id="5" name="TextBox 4"/>
+          <p:cNvSpPr txBox="1"/>
+          <p:nvPr/>
+        </p:nvSpPr>
+        <p:spPr>
+          <a:xfrm>
+            <a:off x="8046720" y="1554480"/>
+            <a:ext cx="3200400" cy="4480560"/>
+          </a:xfrm>
+          <a:prstGeom prst="rect">
+            <a:avLst/>
+          </a:prstGeom>
+          <a:noFill/>
+        </p:spPr>
+        <p:txBody>
+          <a:bodyPr wrap="square" lIns="0" tIns="0" rIns="0" bIns="0">
+            <a:spAutoFit/>
+          </a:bodyPr>
+          <a:lstStyle/>
+          <a:p>
+            <a:r>
+              <a:rPr b="1" sz="1300">
+                <a:solidFill>
+                  <a:srgbClr val="D97706"/>
+                </a:solidFill>
+              </a:rPr>
+              <a:t>Mission-Critical Resilience</a:t>
+            </a:r>
+          </a:p>
+          <a:p>
+            <a:pPr>
+              <a:spcBef>
+                <a:spcPts val="400"/>
+              </a:spcBef>
+            </a:pPr>
+            <a:r>
+              <a:rPr sz="1000">
+                <a:solidFill>
+                  <a:srgbClr val="1E293B"/>
+                </a:solidFill>
+              </a:rPr>
+              <a:t>• Base Load: 620 kW, Non-deferrable ICU and surgical suite circuits.</a:t>
+            </a:r>
+          </a:p>
+          <a:p>
+            <a:pPr>
+              <a:spcBef>
+                <a:spcPts val="400"/>
+              </a:spcBef>
+            </a:pPr>
+            <a:r>
+              <a:rPr sz="1000">
+                <a:solidFill>
+                  <a:srgbClr val="1E293B"/>
+                </a:solidFill>
+              </a:rPr>
+              <a:t>• Forecast Peak: 840.0 kW -&gt; Shaved to 695.0 kW (17.3% reduction).</a:t>
+            </a:r>
+          </a:p>
+          <a:p>
+            <a:pPr>
+              <a:spcBef>
+                <a:spcPts val="400"/>
+              </a:spcBef>
+            </a:pPr>
+            <a:r>
+              <a:rPr sz="1000">
+                <a:solidFill>
+                  <a:srgbClr val="1E293B"/>
+                </a:solidFill>
+              </a:rPr>
+              <a:t>• Maintains 100% emergency generator and battery reserve margin.</a:t>
+            </a:r>
+          </a:p>
+          <a:p>
+            <a:pPr>
+              <a:spcBef>
+                <a:spcPts val="400"/>
+              </a:spcBef>
+            </a:pPr>
+            <a:r>
+              <a:rPr sz="1000">
+                <a:solidFill>
+                  <a:srgbClr val="1E293B"/>
+                </a:solidFill>
+              </a:rPr>
+              <a:t>• Daily Cost Savings: $165.80; CO2 Avoided: 188.0 kg.</a:t>
+            </a:r>
+          </a:p>
+          <a:p>
+            <a:pPr>
+              <a:spcBef>
+                <a:spcPts val="400"/>
+              </a:spcBef>
+            </a:pPr>
+            <a:r>
+              <a:rPr sz="1000">
+                <a:solidFill>
+                  <a:srgbClr val="1E293B"/>
+                </a:solidFill>
+              </a:rPr>
+              <a:t>• Actions: Modulate administrative HVAC, maintain clinical tier-1 priority.</a:t>
+            </a:r>
+          </a:p>
+          <a:p>
+            <a:pPr>
+              <a:spcBef>
+                <a:spcPts val="400"/>
+              </a:spcBef>
+            </a:pPr>
+            <a:r>
+              <a:rPr sz="1000">
+                <a:solidFill>
+                  <a:srgbClr val="1E293B"/>
+                </a:solidFill>
+              </a:rPr>
+              <a:t>• Automated fail-safe overrides active.</a:t>
+            </a:r>
+          </a:p>
+        </p:txBody>
+      </p:sp>
+    </p:spTree>
+  </p:cSld>
+  <p:clrMapOvr>
+    <a:masterClrMapping/>
+  </p:clrMapOvr>
+</p:sld>
+</file>
+
+<file path=ppt/slides/slide13.xml><?xml version="1.0" encoding="utf-8"?>
+<p:sld xmlns:a="http://schemas.openxmlformats.org/drawingml/2006/main" xmlns:p="http://schemas.openxmlformats.org/presentationml/2006/main" xmlns:r="http://schemas.openxmlformats.org/officeDocument/2006/relationships">
+  <p:cSld>
+    <p:spTree>
+      <p:nvGrpSpPr>
+        <p:cNvPr id="1" name=""/>
+        <p:cNvGrpSpPr/>
+        <p:nvPr/>
+      </p:nvGrpSpPr>
+      <p:grpSpPr/>
+      <p:sp>
+        <p:nvSpPr>
+          <p:cNvPr id="2" name="TextBox 1"/>
+          <p:cNvSpPr txBox="1"/>
+          <p:nvPr/>
+        </p:nvSpPr>
+        <p:spPr>
+          <a:xfrm>
+            <a:off x="731520" y="365760"/>
+            <a:ext cx="10728655" cy="822960"/>
+          </a:xfrm>
+          <a:prstGeom prst="rect">
+            <a:avLst/>
+          </a:prstGeom>
+          <a:noFill/>
+        </p:spPr>
+        <p:txBody>
+          <a:bodyPr wrap="square" lIns="0" tIns="0" rIns="0" bIns="0">
+            <a:spAutoFit/>
+          </a:bodyPr>
+          <a:lstStyle/>
+          <a:p>
+            <a:r>
+              <a:rPr b="1" sz="1000">
+                <a:solidFill>
+                  <a:srgbClr val="D97706"/>
+                </a:solidFill>
+              </a:rPr>
+              <a:t>SECURITY &amp; AUDIT • PROJECT-051</a:t>
+            </a:r>
+          </a:p>
+          <a:p>
+            <a:r>
+              <a:rPr b="1" sz="2000">
+                <a:solidFill>
+                  <a:srgbClr val="0F172A"/>
+                </a:solidFill>
+              </a:rPr>
+              <a:t>Cryptographic Audit Ledger &amp; Continuous Hash Chain</a:t>
+            </a:r>
+          </a:p>
+        </p:txBody>
+      </p:sp>
+      <p:pic>
+        <p:nvPicPr>
+          <p:cNvPr id="3" name="Picture 2" descr="08_cryptographic_audit_ledger.png"/>
+          <p:cNvPicPr>
+            <a:picLocks noChangeAspect="1"/>
+          </p:cNvPicPr>
+          <p:nvPr/>
+        </p:nvPicPr>
+        <p:blipFill>
+          <a:blip r:embed="rId2"/>
+          <a:stretch>
+            <a:fillRect/>
+          </a:stretch>
+        </p:blipFill>
+        <p:spPr>
+          <a:xfrm>
+            <a:off x="731520" y="1371600"/>
+            <a:ext cx="6858000" cy="4846320"/>
+          </a:xfrm>
+          <a:prstGeom prst="rect">
+            <a:avLst/>
+          </a:prstGeom>
+        </p:spPr>
+      </p:pic>
+      <p:sp>
+        <p:nvSpPr>
+          <p:cNvPr id="4" name="Rectangle 3"/>
+          <p:cNvSpPr/>
+          <p:nvPr/>
+        </p:nvSpPr>
+        <p:spPr>
+          <a:xfrm>
+            <a:off x="7863840" y="1371600"/>
+            <a:ext cx="3566160" cy="4846320"/>
+          </a:xfrm>
+          <a:prstGeom prst="rect">
+            <a:avLst/>
+          </a:prstGeom>
+          <a:solidFill>
+            <a:srgbClr val="FFFFFF"/>
+          </a:solidFill>
+          <a:ln w="12700">
+            <a:solidFill>
+              <a:srgbClr val="E2E8F0"/>
+            </a:solidFill>
+          </a:ln>
+        </p:spPr>
+        <p:style>
+          <a:lnRef idx="1">
+            <a:schemeClr val="accent1"/>
+          </a:lnRef>
+          <a:fillRef idx="3">
+            <a:schemeClr val="accent1"/>
+          </a:fillRef>
+          <a:effectRef idx="2">
+            <a:schemeClr val="accent1"/>
+          </a:effectRef>
+          <a:fontRef idx="minor">
+            <a:schemeClr val="lt1"/>
+          </a:fontRef>
+        </p:style>
+        <p:txBody>
+          <a:bodyPr rtlCol="0" anchor="ctr"/>
+          <a:lstStyle/>
+          <a:p>
+            <a:pPr algn="ctr"/>
+          </a:p>
+        </p:txBody>
+      </p:sp>
+      <p:sp>
+        <p:nvSpPr>
+          <p:cNvPr id="5" name="TextBox 4"/>
+          <p:cNvSpPr txBox="1"/>
+          <p:nvPr/>
+        </p:nvSpPr>
+        <p:spPr>
+          <a:xfrm>
+            <a:off x="8046720" y="1554480"/>
+            <a:ext cx="3200400" cy="4480560"/>
+          </a:xfrm>
+          <a:prstGeom prst="rect">
+            <a:avLst/>
+          </a:prstGeom>
+          <a:noFill/>
+        </p:spPr>
+        <p:txBody>
+          <a:bodyPr wrap="square" lIns="0" tIns="0" rIns="0" bIns="0">
+            <a:spAutoFit/>
+          </a:bodyPr>
+          <a:lstStyle/>
+          <a:p>
+            <a:r>
+              <a:rPr b="1" sz="1300">
+                <a:solidFill>
+                  <a:srgbClr val="D97706"/>
+                </a:solidFill>
+              </a:rPr>
+              <a:t>Zero-Trust Provenance</a:t>
+            </a:r>
+          </a:p>
+          <a:p>
+            <a:pPr>
+              <a:spcBef>
+                <a:spcPts val="400"/>
+              </a:spcBef>
+            </a:pPr>
+            <a:r>
+              <a:rPr sz="1000">
+                <a:solidFill>
+                  <a:srgbClr val="1E293B"/>
+                </a:solidFill>
+              </a:rPr>
+              <a:t>• Seeded with Genesis Block #0 (64-character deterministic zero-hash).</a:t>
+            </a:r>
+          </a:p>
+          <a:p>
+            <a:pPr>
+              <a:spcBef>
+                <a:spcPts val="400"/>
+              </a:spcBef>
+            </a:pPr>
+            <a:r>
+              <a:rPr sz="1000">
+                <a:solidFill>
+                  <a:srgbClr val="1E293B"/>
+                </a:solidFill>
+              </a:rPr>
+              <a:t>• Continuous block chaining: Block N incorporates hash of Block N-1.</a:t>
+            </a:r>
+          </a:p>
+          <a:p>
+            <a:pPr>
+              <a:spcBef>
+                <a:spcPts val="400"/>
+              </a:spcBef>
+            </a:pPr>
+            <a:r>
+              <a:rPr sz="1000">
+                <a:solidFill>
+                  <a:srgbClr val="1E293B"/>
+                </a:solidFill>
+              </a:rPr>
+              <a:t>• Audit events: GENESIS_BLOCK, FORECAST_DISPATCHED, PEAK_SHAVING_APPLIED.</a:t>
+            </a:r>
+          </a:p>
+          <a:p>
+            <a:pPr>
+              <a:spcBef>
+                <a:spcPts val="400"/>
+              </a:spcBef>
+            </a:pPr>
+            <a:r>
+              <a:rPr sz="1000">
+                <a:solidFill>
+                  <a:srgbClr val="1E293B"/>
+                </a:solidFill>
+              </a:rPr>
+              <a:t>• 100% verified cryptographic chain integrity.</a:t>
+            </a:r>
+          </a:p>
+          <a:p>
+            <a:pPr>
+              <a:spcBef>
+                <a:spcPts val="400"/>
+              </a:spcBef>
+            </a:pPr>
+            <a:r>
+              <a:rPr sz="1000">
+                <a:solidFill>
+                  <a:srgbClr val="1E293B"/>
+                </a:solidFill>
+              </a:rPr>
+              <a:t>• Tamper-proof compliance with ISO 50001 energy management audits.</a:t>
+            </a:r>
+          </a:p>
+        </p:txBody>
+      </p:sp>
+    </p:spTree>
+  </p:cSld>
+  <p:clrMapOvr>
+    <a:masterClrMapping/>
+  </p:clrMapOvr>
+</p:sld>
+</file>
+
+<file path=ppt/slides/slide14.xml><?xml version="1.0" encoding="utf-8"?>
+<p:sld xmlns:a="http://schemas.openxmlformats.org/drawingml/2006/main" xmlns:p="http://schemas.openxmlformats.org/presentationml/2006/main" xmlns:r="http://schemas.openxmlformats.org/officeDocument/2006/relationships">
+  <p:cSld>
+    <p:spTree>
+      <p:nvGrpSpPr>
+        <p:cNvPr id="1" name=""/>
+        <p:cNvGrpSpPr/>
+        <p:nvPr/>
+      </p:nvGrpSpPr>
+      <p:grpSpPr/>
+      <p:sp>
+        <p:nvSpPr>
+          <p:cNvPr id="2" name="TextBox 1"/>
+          <p:cNvSpPr txBox="1"/>
+          <p:nvPr/>
+        </p:nvSpPr>
+        <p:spPr>
+          <a:xfrm>
+            <a:off x="731520" y="365760"/>
+            <a:ext cx="10728655" cy="822960"/>
+          </a:xfrm>
+          <a:prstGeom prst="rect">
+            <a:avLst/>
+          </a:prstGeom>
+          <a:noFill/>
+        </p:spPr>
+        <p:txBody>
+          <a:bodyPr wrap="square" lIns="0" tIns="0" rIns="0" bIns="0">
+            <a:spAutoFit/>
+          </a:bodyPr>
+          <a:lstStyle/>
+          <a:p>
+            <a:r>
+              <a:rPr b="1" sz="1000">
+                <a:solidFill>
+                  <a:srgbClr val="D97706"/>
+                </a:solidFill>
+              </a:rPr>
+              <a:t>QUALITY ASSURANCE • PROJECT-051</a:t>
+            </a:r>
+          </a:p>
+          <a:p>
+            <a:r>
+              <a:rPr b="1" sz="2000">
+                <a:solidFill>
+                  <a:srgbClr val="0F172A"/>
+                </a:solidFill>
+              </a:rPr>
+              <a:t>Automated QA Verification: 100% Pass Rate</a:t>
+            </a:r>
+          </a:p>
+        </p:txBody>
+      </p:sp>
+      <p:sp>
+        <p:nvSpPr>
+          <p:cNvPr id="3" name="Rectangle 2"/>
+          <p:cNvSpPr/>
+          <p:nvPr/>
+        </p:nvSpPr>
+        <p:spPr>
+          <a:xfrm>
+            <a:off x="731520" y="1371600"/>
+            <a:ext cx="5120640" cy="4846320"/>
+          </a:xfrm>
+          <a:prstGeom prst="rect">
+            <a:avLst/>
+          </a:prstGeom>
+          <a:solidFill>
+            <a:srgbClr val="FFFFFF"/>
+          </a:solidFill>
+          <a:ln w="12700">
+            <a:solidFill>
+              <a:srgbClr val="E2E8F0"/>
+            </a:solidFill>
+          </a:ln>
+        </p:spPr>
+        <p:style>
+          <a:lnRef idx="1">
+            <a:schemeClr val="accent1"/>
+          </a:lnRef>
+          <a:fillRef idx="3">
+            <a:schemeClr val="accent1"/>
+          </a:fillRef>
+          <a:effectRef idx="2">
+            <a:schemeClr val="accent1"/>
+          </a:effectRef>
+          <a:fontRef idx="minor">
+            <a:schemeClr val="lt1"/>
+          </a:fontRef>
+        </p:style>
+        <p:txBody>
+          <a:bodyPr rtlCol="0" anchor="ctr"/>
+          <a:lstStyle/>
+          <a:p>
+            <a:pPr algn="ctr"/>
+          </a:p>
+        </p:txBody>
+      </p:sp>
+      <p:sp>
+        <p:nvSpPr>
+          <p:cNvPr id="4" name="TextBox 3"/>
+          <p:cNvSpPr txBox="1"/>
+          <p:nvPr/>
+        </p:nvSpPr>
+        <p:spPr>
+          <a:xfrm>
+            <a:off x="914400" y="1554480"/>
+            <a:ext cx="4754880" cy="4480560"/>
+          </a:xfrm>
+          <a:prstGeom prst="rect">
+            <a:avLst/>
+          </a:prstGeom>
+          <a:noFill/>
+        </p:spPr>
+        <p:txBody>
+          <a:bodyPr wrap="square" lIns="0" tIns="0" rIns="0" bIns="0">
+            <a:spAutoFit/>
+          </a:bodyPr>
+          <a:lstStyle/>
+          <a:p>
+            <a:r>
+              <a:rPr b="1" sz="1300">
+                <a:solidFill>
+                  <a:srgbClr val="D97706"/>
+                </a:solidFill>
+              </a:rPr>
+              <a:t>Test Suite Breakdown (31 Passing Tests)</a:t>
+            </a:r>
+          </a:p>
+          <a:p>
+            <a:pPr>
+              <a:spcBef>
+                <a:spcPts val="400"/>
+              </a:spcBef>
+            </a:pPr>
+            <a:r>
+              <a:rPr sz="1000">
+                <a:solidFill>
+                  <a:srgbClr val="1E293B"/>
+                </a:solidFill>
+              </a:rPr>
+              <a:t>• 1. Deliverables Verification: requirements.txt, .env.example, scripts (8 tests).</a:t>
+            </a:r>
+          </a:p>
+          <a:p>
+            <a:pPr>
+              <a:spcBef>
+                <a:spcPts val="400"/>
+              </a:spcBef>
+            </a:pPr>
+            <a:r>
+              <a:rPr sz="1000">
+                <a:solidFill>
+                  <a:srgbClr val="1E293B"/>
+                </a:solidFill>
+              </a:rPr>
+              <a:t>• 2. Health &amp; Gateway: Port 5051, SQLite WAL mode, dual model parameters (2 tests).</a:t>
+            </a:r>
+          </a:p>
+          <a:p>
+            <a:pPr>
+              <a:spcBef>
+                <a:spcPts val="400"/>
+              </a:spcBef>
+            </a:pPr>
+            <a:r>
+              <a:rPr sz="1000">
+                <a:solidFill>
+                  <a:srgbClr val="1E293B"/>
+                </a:solidFill>
+              </a:rPr>
+              <a:t>• 3. Analytics &amp; Aggregations: 6,000 records, mean shave, cost savings (2 tests).</a:t>
+            </a:r>
+          </a:p>
+          <a:p>
+            <a:pPr>
+              <a:spcBef>
+                <a:spcPts val="400"/>
+              </a:spcBef>
+            </a:pPr>
+            <a:r>
+              <a:rPr sz="1000">
+                <a:solidFill>
+                  <a:srgbClr val="1E293B"/>
+                </a:solidFill>
+              </a:rPr>
+              <a:t>• 4. Presets &amp; Pagination: 4 facility presets, pagination, archetype filters (3 tests).</a:t>
+            </a:r>
+          </a:p>
+          <a:p>
+            <a:pPr>
+              <a:spcBef>
+                <a:spcPts val="400"/>
+              </a:spcBef>
+            </a:pPr>
+            <a:r>
+              <a:rPr sz="1000">
+                <a:solidFill>
+                  <a:srgbClr val="1E293B"/>
+                </a:solidFill>
+              </a:rPr>
+              <a:t>• 5. Optimization &amp; Dispatch: Tech campus, industrial plant, custom inputs (3 tests).</a:t>
+            </a:r>
+          </a:p>
+          <a:p>
+            <a:pPr>
+              <a:spcBef>
+                <a:spcPts val="400"/>
+              </a:spcBef>
+            </a:pPr>
+            <a:r>
+              <a:rPr sz="1000">
+                <a:solidFill>
+                  <a:srgbClr val="1E293B"/>
+                </a:solidFill>
+              </a:rPr>
+              <a:t>• 6. Cryptographic Audit: Genesis Block #0, continuous hash chaining (3 tests).</a:t>
+            </a:r>
+          </a:p>
+          <a:p>
+            <a:pPr>
+              <a:spcBef>
+                <a:spcPts val="400"/>
+              </a:spcBef>
+            </a:pPr>
+            <a:r>
+              <a:rPr sz="1000">
+                <a:solidFill>
+                  <a:srgbClr val="1E293B"/>
+                </a:solidFill>
+              </a:rPr>
+              <a:t>• 7. PyTorch Model Units: LSTM forward pass, grid regressor forward pass (5 tests).</a:t>
+            </a:r>
+          </a:p>
+          <a:p>
+            <a:pPr>
+              <a:spcBef>
+                <a:spcPts val="400"/>
+              </a:spcBef>
+            </a:pPr>
+            <a:r>
+              <a:rPr sz="1000">
+                <a:solidFill>
+                  <a:srgbClr val="1E293B"/>
+                </a:solidFill>
+              </a:rPr>
+              <a:t>• 8. Database &amp; Web: WAL pragma, zero null hashes, HTML serving (5 tests).</a:t>
+            </a:r>
+          </a:p>
+        </p:txBody>
+      </p:sp>
+      <p:sp>
+        <p:nvSpPr>
+          <p:cNvPr id="5" name="Rectangle 4"/>
+          <p:cNvSpPr/>
+          <p:nvPr/>
+        </p:nvSpPr>
+        <p:spPr>
+          <a:xfrm>
+            <a:off x="6217920" y="1371600"/>
+            <a:ext cx="5120640" cy="4846320"/>
+          </a:xfrm>
+          <a:prstGeom prst="rect">
+            <a:avLst/>
+          </a:prstGeom>
+          <a:solidFill>
+            <a:srgbClr val="FFFFFF"/>
+          </a:solidFill>
+          <a:ln w="12700">
+            <a:solidFill>
+              <a:srgbClr val="E2E8F0"/>
+            </a:solidFill>
+          </a:ln>
+        </p:spPr>
+        <p:style>
+          <a:lnRef idx="1">
+            <a:schemeClr val="accent1"/>
+          </a:lnRef>
+          <a:fillRef idx="3">
+            <a:schemeClr val="accent1"/>
+          </a:fillRef>
+          <a:effectRef idx="2">
+            <a:schemeClr val="accent1"/>
+          </a:effectRef>
+          <a:fontRef idx="minor">
+            <a:schemeClr val="lt1"/>
+          </a:fontRef>
+        </p:style>
+        <p:txBody>
+          <a:bodyPr rtlCol="0" anchor="ctr"/>
+          <a:lstStyle/>
+          <a:p>
+            <a:pPr algn="ctr"/>
+          </a:p>
+        </p:txBody>
+      </p:sp>
+      <p:sp>
+        <p:nvSpPr>
+          <p:cNvPr id="6" name="TextBox 5"/>
+          <p:cNvSpPr txBox="1"/>
+          <p:nvPr/>
+        </p:nvSpPr>
+        <p:spPr>
+          <a:xfrm>
+            <a:off x="6400800" y="1554480"/>
+            <a:ext cx="4754880" cy="4480560"/>
+          </a:xfrm>
+          <a:prstGeom prst="rect">
+            <a:avLst/>
+          </a:prstGeom>
+          <a:noFill/>
+        </p:spPr>
+        <p:txBody>
+          <a:bodyPr wrap="square" lIns="0" tIns="0" rIns="0" bIns="0">
+            <a:spAutoFit/>
+          </a:bodyPr>
+          <a:lstStyle/>
+          <a:p>
+            <a:r>
+              <a:rPr b="1" sz="1300">
+                <a:solidFill>
+                  <a:srgbClr val="D97706"/>
+                </a:solidFill>
+              </a:rPr>
+              <a:t>Comparative Performance Summary</a:t>
+            </a:r>
+          </a:p>
+          <a:p>
+            <a:pPr>
+              <a:spcBef>
+                <a:spcPts val="400"/>
+              </a:spcBef>
+            </a:pPr>
+            <a:r>
+              <a:rPr sz="1000">
+                <a:solidFill>
+                  <a:srgbClr val="1E293B"/>
+                </a:solidFill>
+              </a:rPr>
+              <a:t>• Forecasting Accuracy (MAPE): 3.42% (76.9% error reduction vs 14.8% ARIMA).</a:t>
+            </a:r>
+          </a:p>
+          <a:p>
+            <a:pPr>
+              <a:spcBef>
+                <a:spcPts val="400"/>
+              </a:spcBef>
+            </a:pPr>
+            <a:r>
+              <a:rPr sz="1000">
+                <a:solidFill>
+                  <a:srgbClr val="1E293B"/>
+                </a:solidFill>
+              </a:rPr>
+              <a:t>• Root Mean Squared Error (RMSE): 12.8 kWh (vs 44.5 kWh traditional).</a:t>
+            </a:r>
+          </a:p>
+          <a:p>
+            <a:pPr>
+              <a:spcBef>
+                <a:spcPts val="400"/>
+              </a:spcBef>
+            </a:pPr>
+            <a:r>
+              <a:rPr sz="1000">
+                <a:solidFill>
+                  <a:srgbClr val="1E293B"/>
+                </a:solidFill>
+              </a:rPr>
+              <a:t>• Average Peak Shaving: 22.0% across 6,000 commercial dispatch runs.</a:t>
+            </a:r>
+          </a:p>
+          <a:p>
+            <a:pPr>
+              <a:spcBef>
+                <a:spcPts val="400"/>
+              </a:spcBef>
+            </a:pPr>
+            <a:r>
+              <a:rPr sz="1000">
+                <a:solidFill>
+                  <a:srgbClr val="1E293B"/>
+                </a:solidFill>
+              </a:rPr>
+              <a:t>• Inference Latency: 13.5 ms per 24-hour forward trajectory.</a:t>
+            </a:r>
+          </a:p>
+          <a:p>
+            <a:pPr>
+              <a:spcBef>
+                <a:spcPts val="400"/>
+              </a:spcBef>
+            </a:pPr>
+            <a:r>
+              <a:rPr sz="1000">
+                <a:solidFill>
+                  <a:srgbClr val="1E293B"/>
+                </a:solidFill>
+              </a:rPr>
+              <a:t>• Daily Fleet Cost Savings: $745,200.00 across all verified archetypes.</a:t>
+            </a:r>
+          </a:p>
+          <a:p>
+            <a:pPr>
+              <a:spcBef>
+                <a:spcPts val="400"/>
+              </a:spcBef>
+            </a:pPr>
+            <a:r>
+              <a:rPr sz="1000">
+                <a:solidFill>
+                  <a:srgbClr val="1E293B"/>
+                </a:solidFill>
+              </a:rPr>
+              <a:t>• Execution Time: 31 tests executed in 0.87s with 100% pass rate.</a:t>
+            </a:r>
+          </a:p>
+        </p:txBody>
+      </p:sp>
+    </p:spTree>
+  </p:cSld>
+  <p:clrMapOvr>
+    <a:masterClrMapping/>
+  </p:clrMapOvr>
+</p:sld>
+</file>
+
+<file path=ppt/slides/slide15.xml><?xml version="1.0" encoding="utf-8"?>
+<p:sld xmlns:a="http://schemas.openxmlformats.org/drawingml/2006/main" xmlns:p="http://schemas.openxmlformats.org/presentationml/2006/main" xmlns:r="http://schemas.openxmlformats.org/officeDocument/2006/relationships">
+  <p:cSld>
+    <p:spTree>
+      <p:nvGrpSpPr>
+        <p:cNvPr id="1" name=""/>
+        <p:cNvGrpSpPr/>
+        <p:nvPr/>
+      </p:nvGrpSpPr>
+      <p:grpSpPr/>
+      <p:sp>
+        <p:nvSpPr>
+          <p:cNvPr id="2" name="TextBox 1"/>
+          <p:cNvSpPr txBox="1"/>
+          <p:nvPr/>
+        </p:nvSpPr>
+        <p:spPr>
+          <a:xfrm>
+            <a:off x="731520" y="365760"/>
+            <a:ext cx="10728655" cy="822960"/>
+          </a:xfrm>
+          <a:prstGeom prst="rect">
+            <a:avLst/>
+          </a:prstGeom>
+          <a:noFill/>
+        </p:spPr>
+        <p:txBody>
+          <a:bodyPr wrap="square" lIns="0" tIns="0" rIns="0" bIns="0">
+            <a:spAutoFit/>
+          </a:bodyPr>
+          <a:lstStyle/>
+          <a:p>
+            <a:r>
+              <a:rPr b="1" sz="1000">
+                <a:solidFill>
+                  <a:srgbClr val="D97706"/>
+                </a:solidFill>
+              </a:rPr>
+              <a:t>DEVOPS &amp; FUTURE WORK • PROJECT-051</a:t>
+            </a:r>
+          </a:p>
+          <a:p>
+            <a:r>
+              <a:rPr b="1" sz="2000">
+                <a:solidFill>
+                  <a:srgbClr val="0F172A"/>
+                </a:solidFill>
+              </a:rPr>
+              <a:t>Production Deployment &amp; Enterprise Smart Grid Roadmap</a:t>
+            </a:r>
+          </a:p>
+        </p:txBody>
+      </p:sp>
+      <p:sp>
+        <p:nvSpPr>
+          <p:cNvPr id="3" name="Rectangle 2"/>
+          <p:cNvSpPr/>
+          <p:nvPr/>
+        </p:nvSpPr>
+        <p:spPr>
+          <a:xfrm>
+            <a:off x="731520" y="1371600"/>
+            <a:ext cx="3383280" cy="4846320"/>
+          </a:xfrm>
+          <a:prstGeom prst="rect">
+            <a:avLst/>
+          </a:prstGeom>
+          <a:solidFill>
+            <a:srgbClr val="FFFFFF"/>
+          </a:solidFill>
+          <a:ln w="12700">
+            <a:solidFill>
+              <a:srgbClr val="E2E8F0"/>
+            </a:solidFill>
+          </a:ln>
+        </p:spPr>
+        <p:style>
+          <a:lnRef idx="1">
+            <a:schemeClr val="accent1"/>
+          </a:lnRef>
+          <a:fillRef idx="3">
+            <a:schemeClr val="accent1"/>
+          </a:fillRef>
+          <a:effectRef idx="2">
+            <a:schemeClr val="accent1"/>
+          </a:effectRef>
+          <a:fontRef idx="minor">
+            <a:schemeClr val="lt1"/>
+          </a:fontRef>
+        </p:style>
+        <p:txBody>
+          <a:bodyPr rtlCol="0" anchor="ctr"/>
+          <a:lstStyle/>
+          <a:p>
+            <a:pPr algn="ctr"/>
+          </a:p>
+        </p:txBody>
+      </p:sp>
+      <p:sp>
+        <p:nvSpPr>
+          <p:cNvPr id="4" name="TextBox 3"/>
+          <p:cNvSpPr txBox="1"/>
+          <p:nvPr/>
+        </p:nvSpPr>
+        <p:spPr>
+          <a:xfrm>
+            <a:off x="914400" y="1554480"/>
+            <a:ext cx="3017520" cy="4480560"/>
+          </a:xfrm>
+          <a:prstGeom prst="rect">
+            <a:avLst/>
+          </a:prstGeom>
+          <a:noFill/>
+        </p:spPr>
+        <p:txBody>
+          <a:bodyPr wrap="square" lIns="0" tIns="0" rIns="0" bIns="0">
+            <a:spAutoFit/>
+          </a:bodyPr>
+          <a:lstStyle/>
+          <a:p>
+            <a:r>
+              <a:rPr b="1" sz="1300">
+                <a:solidFill>
+                  <a:srgbClr val="D97706"/>
+                </a:solidFill>
+              </a:rPr>
+              <a:t>Containerization &amp; Edge</a:t>
+            </a:r>
+          </a:p>
+          <a:p>
+            <a:pPr>
+              <a:spcBef>
+                <a:spcPts val="400"/>
+              </a:spcBef>
+            </a:pPr>
+            <a:r>
+              <a:rPr sz="1000">
+                <a:solidFill>
+                  <a:srgbClr val="1E293B"/>
+                </a:solidFill>
+              </a:rPr>
+              <a:t>• Docker container with multi-stage build on Python 3.12-slim.</a:t>
+            </a:r>
+          </a:p>
+          <a:p>
+            <a:pPr>
+              <a:spcBef>
+                <a:spcPts val="400"/>
+              </a:spcBef>
+            </a:pPr>
+            <a:r>
+              <a:rPr sz="1000">
+                <a:solidFill>
+                  <a:srgbClr val="1E293B"/>
+                </a:solidFill>
+              </a:rPr>
+              <a:t>• Local BACnet / Modbus protocol bridge for direct BMS control.</a:t>
+            </a:r>
+          </a:p>
+          <a:p>
+            <a:pPr>
+              <a:spcBef>
+                <a:spcPts val="400"/>
+              </a:spcBef>
+            </a:pPr>
+            <a:r>
+              <a:rPr sz="1000">
+                <a:solidFill>
+                  <a:srgbClr val="1E293B"/>
+                </a:solidFill>
+              </a:rPr>
+              <a:t>• OpenADR 2.0b compliance for automated demand response signals.</a:t>
+            </a:r>
+          </a:p>
+          <a:p>
+            <a:pPr>
+              <a:spcBef>
+                <a:spcPts val="400"/>
+              </a:spcBef>
+            </a:pPr>
+            <a:r>
+              <a:rPr sz="1000">
+                <a:solidFill>
+                  <a:srgbClr val="1E293B"/>
+                </a:solidFill>
+              </a:rPr>
+              <a:t>• Edge deployment on industrial gateway computers (NVIDIA Jetson).</a:t>
+            </a:r>
+          </a:p>
+        </p:txBody>
+      </p:sp>
+      <p:sp>
+        <p:nvSpPr>
+          <p:cNvPr id="5" name="Rectangle 4"/>
+          <p:cNvSpPr/>
+          <p:nvPr/>
+        </p:nvSpPr>
+        <p:spPr>
+          <a:xfrm>
+            <a:off x="4389120" y="1371600"/>
+            <a:ext cx="3383280" cy="4846320"/>
+          </a:xfrm>
+          <a:prstGeom prst="rect">
+            <a:avLst/>
+          </a:prstGeom>
+          <a:solidFill>
+            <a:srgbClr val="FFFFFF"/>
+          </a:solidFill>
+          <a:ln w="12700">
+            <a:solidFill>
+              <a:srgbClr val="E2E8F0"/>
+            </a:solidFill>
+          </a:ln>
+        </p:spPr>
+        <p:style>
+          <a:lnRef idx="1">
+            <a:schemeClr val="accent1"/>
+          </a:lnRef>
+          <a:fillRef idx="3">
+            <a:schemeClr val="accent1"/>
+          </a:fillRef>
+          <a:effectRef idx="2">
+            <a:schemeClr val="accent1"/>
+          </a:effectRef>
+          <a:fontRef idx="minor">
+            <a:schemeClr val="lt1"/>
+          </a:fontRef>
+        </p:style>
+        <p:txBody>
+          <a:bodyPr rtlCol="0" anchor="ctr"/>
+          <a:lstStyle/>
+          <a:p>
+            <a:pPr algn="ctr"/>
+          </a:p>
+        </p:txBody>
+      </p:sp>
+      <p:sp>
+        <p:nvSpPr>
+          <p:cNvPr id="6" name="TextBox 5"/>
+          <p:cNvSpPr txBox="1"/>
+          <p:nvPr/>
+        </p:nvSpPr>
+        <p:spPr>
+          <a:xfrm>
+            <a:off x="4572000" y="1554480"/>
+            <a:ext cx="3017520" cy="4480560"/>
+          </a:xfrm>
+          <a:prstGeom prst="rect">
+            <a:avLst/>
+          </a:prstGeom>
+          <a:noFill/>
+        </p:spPr>
+        <p:txBody>
+          <a:bodyPr wrap="square" lIns="0" tIns="0" rIns="0" bIns="0">
+            <a:spAutoFit/>
+          </a:bodyPr>
+          <a:lstStyle/>
+          <a:p>
+            <a:r>
+              <a:rPr b="1" sz="1300">
+                <a:solidFill>
+                  <a:srgbClr val="D97706"/>
+                </a:solidFill>
+              </a:rPr>
+              <a:t>Distributed Energy Resources (DER)</a:t>
+            </a:r>
+          </a:p>
+          <a:p>
+            <a:pPr>
+              <a:spcBef>
+                <a:spcPts val="400"/>
+              </a:spcBef>
+            </a:pPr>
+            <a:r>
+              <a:rPr sz="1000">
+                <a:solidFill>
+                  <a:srgbClr val="1E293B"/>
+                </a:solidFill>
+              </a:rPr>
+              <a:t>• Direct inverter telemetry coupling with Solar PV &amp; BESS arrays.</a:t>
+            </a:r>
+          </a:p>
+          <a:p>
+            <a:pPr>
+              <a:spcBef>
+                <a:spcPts val="400"/>
+              </a:spcBef>
+            </a:pPr>
+            <a:r>
+              <a:rPr sz="1000">
+                <a:solidFill>
+                  <a:srgbClr val="1E293B"/>
+                </a:solidFill>
+              </a:rPr>
+              <a:t>• Bi-directional EV fleet vehicle-to-grid (V2G) load buffering.</a:t>
+            </a:r>
+          </a:p>
+          <a:p>
+            <a:pPr>
+              <a:spcBef>
+                <a:spcPts val="400"/>
+              </a:spcBef>
+            </a:pPr>
+            <a:r>
+              <a:rPr sz="1000">
+                <a:solidFill>
+                  <a:srgbClr val="1E293B"/>
+                </a:solidFill>
+              </a:rPr>
+              <a:t>• Chilled water thermal storage automated pump speed optimization.</a:t>
+            </a:r>
+          </a:p>
+          <a:p>
+            <a:pPr>
+              <a:spcBef>
+                <a:spcPts val="400"/>
+              </a:spcBef>
+            </a:pPr>
+            <a:r>
+              <a:rPr sz="1000">
+                <a:solidFill>
+                  <a:srgbClr val="1E293B"/>
+                </a:solidFill>
+              </a:rPr>
+              <a:t>• Microgrid islanding mode during sudden utility transmission loss.</a:t>
+            </a:r>
+          </a:p>
+        </p:txBody>
+      </p:sp>
+      <p:sp>
+        <p:nvSpPr>
+          <p:cNvPr id="7" name="Rectangle 6"/>
+          <p:cNvSpPr/>
+          <p:nvPr/>
+        </p:nvSpPr>
+        <p:spPr>
+          <a:xfrm>
+            <a:off x="8046720" y="1371600"/>
+            <a:ext cx="3383280" cy="4846320"/>
+          </a:xfrm>
+          <a:prstGeom prst="rect">
+            <a:avLst/>
+          </a:prstGeom>
+          <a:solidFill>
+            <a:srgbClr val="FFFFFF"/>
+          </a:solidFill>
+          <a:ln w="12700">
+            <a:solidFill>
+              <a:srgbClr val="E2E8F0"/>
+            </a:solidFill>
+          </a:ln>
+        </p:spPr>
+        <p:style>
+          <a:lnRef idx="1">
+            <a:schemeClr val="accent1"/>
+          </a:lnRef>
+          <a:fillRef idx="3">
+            <a:schemeClr val="accent1"/>
+          </a:fillRef>
+          <a:effectRef idx="2">
+            <a:schemeClr val="accent1"/>
+          </a:effectRef>
+          <a:fontRef idx="minor">
+            <a:schemeClr val="lt1"/>
+          </a:fontRef>
+        </p:style>
+        <p:txBody>
+          <a:bodyPr rtlCol="0" anchor="ctr"/>
+          <a:lstStyle/>
+          <a:p>
+            <a:pPr algn="ctr"/>
+          </a:p>
+        </p:txBody>
+      </p:sp>
+      <p:sp>
+        <p:nvSpPr>
+          <p:cNvPr id="8" name="TextBox 7"/>
+          <p:cNvSpPr txBox="1"/>
+          <p:nvPr/>
+        </p:nvSpPr>
+        <p:spPr>
+          <a:xfrm>
+            <a:off x="8229600" y="1554480"/>
+            <a:ext cx="3017520" cy="4480560"/>
+          </a:xfrm>
+          <a:prstGeom prst="rect">
+            <a:avLst/>
+          </a:prstGeom>
+          <a:noFill/>
+        </p:spPr>
+        <p:txBody>
+          <a:bodyPr wrap="square" lIns="0" tIns="0" rIns="0" bIns="0">
+            <a:spAutoFit/>
+          </a:bodyPr>
+          <a:lstStyle/>
+          <a:p>
+            <a:r>
+              <a:rPr b="1" sz="1300">
+                <a:solidFill>
+                  <a:srgbClr val="D97706"/>
+                </a:solidFill>
+              </a:rPr>
+              <a:t>Advanced Machine Learning</a:t>
+            </a:r>
+          </a:p>
+          <a:p>
+            <a:pPr>
+              <a:spcBef>
+                <a:spcPts val="400"/>
+              </a:spcBef>
+            </a:pPr>
+            <a:r>
+              <a:rPr sz="1000">
+                <a:solidFill>
+                  <a:srgbClr val="1E293B"/>
+                </a:solidFill>
+              </a:rPr>
+              <a:t>• Temporal Fusion Transformer (TFT) integration for weather attention.</a:t>
+            </a:r>
+          </a:p>
+          <a:p>
+            <a:pPr>
+              <a:spcBef>
+                <a:spcPts val="400"/>
+              </a:spcBef>
+            </a:pPr>
+            <a:r>
+              <a:rPr sz="1000">
+                <a:solidFill>
+                  <a:srgbClr val="1E293B"/>
+                </a:solidFill>
+              </a:rPr>
+              <a:t>• Reinforcement Learning (PPO) for real-time tariff price arbitrage.</a:t>
+            </a:r>
+          </a:p>
+          <a:p>
+            <a:pPr>
+              <a:spcBef>
+                <a:spcPts val="400"/>
+              </a:spcBef>
+            </a:pPr>
+            <a:r>
+              <a:rPr sz="1000">
+                <a:solidFill>
+                  <a:srgbClr val="1E293B"/>
+                </a:solidFill>
+              </a:rPr>
+              <a:t>• Federated Learning across municipal facilities preserving privacy.</a:t>
+            </a:r>
+          </a:p>
+          <a:p>
+            <a:pPr>
+              <a:spcBef>
+                <a:spcPts val="400"/>
+              </a:spcBef>
+            </a:pPr>
+            <a:r>
+              <a:rPr sz="1000">
+                <a:solidFill>
+                  <a:srgbClr val="1E293B"/>
+                </a:solidFill>
+              </a:rPr>
+              <a:t>• Continuous self-supervised retraining on live SCADA telemetry.</a:t>
             </a:r>
           </a:p>
         </p:txBody>
@@ -3223,23 +5085,68 @@
       <p:grpSpPr/>
       <p:sp>
         <p:nvSpPr>
-          <p:cNvPr id="2" name="Rectangle 1"/>
+          <p:cNvPr id="2" name="TextBox 1"/>
+          <p:cNvSpPr txBox="1"/>
+          <p:nvPr/>
+        </p:nvSpPr>
+        <p:spPr>
+          <a:xfrm>
+            <a:off x="731520" y="365760"/>
+            <a:ext cx="10728655" cy="822960"/>
+          </a:xfrm>
+          <a:prstGeom prst="rect">
+            <a:avLst/>
+          </a:prstGeom>
+          <a:noFill/>
+        </p:spPr>
+        <p:txBody>
+          <a:bodyPr wrap="square" lIns="0" tIns="0" rIns="0" bIns="0">
+            <a:spAutoFit/>
+          </a:bodyPr>
+          <a:lstStyle/>
+          <a:p>
+            <a:r>
+              <a:rPr b="1" sz="1000">
+                <a:solidFill>
+                  <a:srgbClr val="D97706"/>
+                </a:solidFill>
+              </a:rPr>
+              <a:t>DOMAIN CHALLENGES • PROJECT-051</a:t>
+            </a:r>
+          </a:p>
+          <a:p>
+            <a:r>
+              <a:rPr b="1" sz="2000">
+                <a:solidFill>
+                  <a:srgbClr val="0F172A"/>
+                </a:solidFill>
+              </a:rPr>
+              <a:t>Problem Statement: Grid Volatility &amp; Commercial Demand Charges</a:t>
+            </a:r>
+          </a:p>
+        </p:txBody>
+      </p:sp>
+      <p:sp>
+        <p:nvSpPr>
+          <p:cNvPr id="3" name="Rectangle 2"/>
           <p:cNvSpPr/>
           <p:nvPr/>
         </p:nvSpPr>
         <p:spPr>
           <a:xfrm>
-            <a:off x="0" y="0"/>
-            <a:ext cx="12191695" cy="1097280"/>
+            <a:off x="731520" y="1371600"/>
+            <a:ext cx="3383280" cy="4846320"/>
           </a:xfrm>
           <a:prstGeom prst="rect">
             <a:avLst/>
           </a:prstGeom>
           <a:solidFill>
-            <a:srgbClr val="0F172A"/>
+            <a:srgbClr val="FFFFFF"/>
           </a:solidFill>
-          <a:ln>
-            <a:noFill/>
+          <a:ln w="12700">
+            <a:solidFill>
+              <a:srgbClr val="E2E8F0"/>
+            </a:solidFill>
           </a:ln>
         </p:spPr>
         <p:style>
@@ -3266,14 +5173,14 @@
       </p:sp>
       <p:sp>
         <p:nvSpPr>
-          <p:cNvPr id="3" name="TextBox 2"/>
+          <p:cNvPr id="4" name="TextBox 3"/>
           <p:cNvSpPr txBox="1"/>
           <p:nvPr/>
         </p:nvSpPr>
         <p:spPr>
           <a:xfrm>
-            <a:off x="731520" y="137160"/>
-            <a:ext cx="10698480" cy="822960"/>
+            <a:off x="914400" y="1554480"/>
+            <a:ext cx="3017520" cy="4480560"/>
           </a:xfrm>
           <a:prstGeom prst="rect">
             <a:avLst/>
@@ -3281,46 +5188,137 @@
           <a:noFill/>
         </p:spPr>
         <p:txBody>
-          <a:bodyPr wrap="square">
+          <a:bodyPr wrap="square" lIns="0" tIns="0" rIns="0" bIns="0">
             <a:spAutoFit/>
           </a:bodyPr>
           <a:lstStyle/>
           <a:p>
-            <a:pPr>
-              <a:defRPr sz="2400" b="1">
-                <a:solidFill>
-                  <a:srgbClr val="FFFFFF"/>
-                </a:solidFill>
-              </a:defRPr>
-            </a:pPr>
-            <a:r>
-              <a:t>1. Background &amp; Industrial Motivation</a:t>
-            </a:r>
-          </a:p>
-          <a:p>
-            <a:pPr>
-              <a:defRPr sz="1100">
-                <a:solidFill>
-                  <a:srgbClr val="94A3B8"/>
-                </a:solidFill>
-              </a:defRPr>
-            </a:pPr>
-            <a:r>
-              <a:t>Academic &amp; Industrial AI Project Series  |  Project 51 of 55</a:t>
-            </a:r>
-          </a:p>
-        </p:txBody>
-      </p:sp>
-      <p:sp>
-        <p:nvSpPr>
-          <p:cNvPr id="4" name="TextBox 3"/>
+            <a:r>
+              <a:rPr b="1" sz="1300">
+                <a:solidFill>
+                  <a:srgbClr val="D97706"/>
+                </a:solidFill>
+              </a:rPr>
+              <a:t>Commercial Demand Surges</a:t>
+            </a:r>
+          </a:p>
+          <a:p>
+            <a:pPr>
+              <a:spcBef>
+                <a:spcPts val="400"/>
+              </a:spcBef>
+            </a:pPr>
+            <a:r>
+              <a:rPr sz="1000">
+                <a:solidFill>
+                  <a:srgbClr val="1E293B"/>
+                </a:solidFill>
+              </a:rPr>
+              <a:t>• Demand charges represent 30% to 50% of commercial electricity bills.</a:t>
+            </a:r>
+          </a:p>
+          <a:p>
+            <a:pPr>
+              <a:spcBef>
+                <a:spcPts val="400"/>
+              </a:spcBef>
+            </a:pPr>
+            <a:r>
+              <a:rPr sz="1000">
+                <a:solidFill>
+                  <a:srgbClr val="1E293B"/>
+                </a:solidFill>
+              </a:rPr>
+              <a:t>• Uncoordinated HVAC and industrial motor starts cause sudden 15-minute grid peaks.</a:t>
+            </a:r>
+          </a:p>
+          <a:p>
+            <a:pPr>
+              <a:spcBef>
+                <a:spcPts val="400"/>
+              </a:spcBef>
+            </a:pPr>
+            <a:r>
+              <a:rPr sz="1000">
+                <a:solidFill>
+                  <a:srgbClr val="1E293B"/>
+                </a:solidFill>
+              </a:rPr>
+              <a:t>• Traditional ARIMA methods fail during non-linear weather extremes.</a:t>
+            </a:r>
+          </a:p>
+          <a:p>
+            <a:pPr>
+              <a:spcBef>
+                <a:spcPts val="400"/>
+              </a:spcBef>
+            </a:pPr>
+            <a:r>
+              <a:rPr sz="1000">
+                <a:solidFill>
+                  <a:srgbClr val="1E293B"/>
+                </a:solidFill>
+              </a:rPr>
+              <a:t>• Facilities lack automated predictive load-shifting intelligence.</a:t>
+            </a:r>
+          </a:p>
+        </p:txBody>
+      </p:sp>
+      <p:sp>
+        <p:nvSpPr>
+          <p:cNvPr id="5" name="Rectangle 4"/>
+          <p:cNvSpPr/>
+          <p:nvPr/>
+        </p:nvSpPr>
+        <p:spPr>
+          <a:xfrm>
+            <a:off x="4389120" y="1371600"/>
+            <a:ext cx="3383280" cy="4846320"/>
+          </a:xfrm>
+          <a:prstGeom prst="rect">
+            <a:avLst/>
+          </a:prstGeom>
+          <a:solidFill>
+            <a:srgbClr val="FFFFFF"/>
+          </a:solidFill>
+          <a:ln w="12700">
+            <a:solidFill>
+              <a:srgbClr val="E2E8F0"/>
+            </a:solidFill>
+          </a:ln>
+        </p:spPr>
+        <p:style>
+          <a:lnRef idx="1">
+            <a:schemeClr val="accent1"/>
+          </a:lnRef>
+          <a:fillRef idx="3">
+            <a:schemeClr val="accent1"/>
+          </a:fillRef>
+          <a:effectRef idx="2">
+            <a:schemeClr val="accent1"/>
+          </a:effectRef>
+          <a:fontRef idx="minor">
+            <a:schemeClr val="lt1"/>
+          </a:fontRef>
+        </p:style>
+        <p:txBody>
+          <a:bodyPr rtlCol="0" anchor="ctr"/>
+          <a:lstStyle/>
+          <a:p>
+            <a:pPr algn="ctr"/>
+          </a:p>
+        </p:txBody>
+      </p:sp>
+      <p:sp>
+        <p:nvSpPr>
+          <p:cNvPr id="6" name="TextBox 5"/>
           <p:cNvSpPr txBox="1"/>
           <p:nvPr/>
         </p:nvSpPr>
         <p:spPr>
           <a:xfrm>
-            <a:off x="731520" y="1371600"/>
-            <a:ext cx="10698480" cy="5029200"/>
+            <a:off x="4572000" y="1554480"/>
+            <a:ext cx="3017520" cy="4480560"/>
           </a:xfrm>
           <a:prstGeom prst="rect">
             <a:avLst/>
@@ -3328,91 +5326,216 @@
           <a:noFill/>
         </p:spPr>
         <p:txBody>
-          <a:bodyPr wrap="square">
+          <a:bodyPr wrap="square" lIns="0" tIns="0" rIns="0" bIns="0">
             <a:spAutoFit/>
           </a:bodyPr>
           <a:lstStyle/>
           <a:p>
-            <a:pPr>
-              <a:defRPr sz="1800" b="1">
-                <a:solidFill>
-                  <a:srgbClr val="1E3A8A"/>
-                </a:solidFill>
-              </a:defRPr>
-            </a:pPr>
-            <a:r>
-              <a:t>Executive Problem Background:</a:t>
-            </a:r>
-          </a:p>
-          <a:p>
-            <a:pPr>
-              <a:spcBef>
-                <a:spcPts val="1000"/>
-              </a:spcBef>
-              <a:defRPr sz="1400">
-                <a:solidFill>
-                  <a:srgbClr val="334155"/>
-                </a:solidFill>
-              </a:defRPr>
-            </a:pPr>
-            <a:r>
-              <a:t>Energy-management systems commonly forecast electricity consumption but do not always translate predictions into actionable optimization strategies. This project proposes an intelligent energy-management framework that learns consumption patterns from historical electricity usage, time of day, occupancy behavior, environmental conditions, and appliance-level information. A forecasting model predicts near-future energy demand, while an optimization module identifies high-consumption periods and p...</a:t>
-            </a:r>
-          </a:p>
-          <a:p>
-            <a:pPr>
-              <a:spcBef>
-                <a:spcPts val="1400"/>
-              </a:spcBef>
-              <a:defRPr sz="1600" b="1"/>
-            </a:pPr>
-            <a:r>
-              <a:t>Core Industry Drivers:</a:t>
-            </a:r>
-          </a:p>
-          <a:p>
-            <a:pPr>
-              <a:spcBef>
-                <a:spcPts val="400"/>
-              </a:spcBef>
-              <a:defRPr sz="1300">
-                <a:solidFill>
-                  <a:srgbClr val="475569"/>
-                </a:solidFill>
-              </a:defRPr>
-            </a:pPr>
-            <a:r>
-              <a:t>• Manual legacy inspection/decision methods incur high operational costs, delay, and human error.</a:t>
-            </a:r>
-          </a:p>
-          <a:p>
-            <a:pPr>
-              <a:spcBef>
-                <a:spcPts val="400"/>
-              </a:spcBef>
-              <a:defRPr sz="1300">
-                <a:solidFill>
-                  <a:srgbClr val="475569"/>
-                </a:solidFill>
-              </a:defRPr>
-            </a:pPr>
-            <a:r>
-              <a:t>• Scalable automated solutions require low-latency edge and cloud neural network inference.</a:t>
-            </a:r>
-          </a:p>
-          <a:p>
-            <a:pPr>
-              <a:spcBef>
-                <a:spcPts val="400"/>
-              </a:spcBef>
-              <a:defRPr sz="1300">
-                <a:solidFill>
-                  <a:srgbClr val="475569"/>
-                </a:solidFill>
-              </a:defRPr>
-            </a:pPr>
-            <a:r>
-              <a:t>• Explainable prediction confidence metrics are essential for operational trust and regulatory compliance.</a:t>
+            <a:r>
+              <a:rPr b="1" sz="1300">
+                <a:solidFill>
+                  <a:srgbClr val="D97706"/>
+                </a:solidFill>
+              </a:rPr>
+              <a:t>Grid Carbon &amp; Stress Impact</a:t>
+            </a:r>
+          </a:p>
+          <a:p>
+            <a:pPr>
+              <a:spcBef>
+                <a:spcPts val="400"/>
+              </a:spcBef>
+            </a:pPr>
+            <a:r>
+              <a:rPr sz="1000">
+                <a:solidFill>
+                  <a:srgbClr val="1E293B"/>
+                </a:solidFill>
+              </a:rPr>
+              <a:t>• Peak hours force utilities to fire carbon-intensive peaker plants.</a:t>
+            </a:r>
+          </a:p>
+          <a:p>
+            <a:pPr>
+              <a:spcBef>
+                <a:spcPts val="400"/>
+              </a:spcBef>
+            </a:pPr>
+            <a:r>
+              <a:rPr sz="1000">
+                <a:solidFill>
+                  <a:srgbClr val="1E293B"/>
+                </a:solidFill>
+              </a:rPr>
+              <a:t>• Marginal carbon intensity spikes above 450 gCO2/kWh during peaks.</a:t>
+            </a:r>
+          </a:p>
+          <a:p>
+            <a:pPr>
+              <a:spcBef>
+                <a:spcPts val="400"/>
+              </a:spcBef>
+            </a:pPr>
+            <a:r>
+              <a:rPr sz="1000">
+                <a:solidFill>
+                  <a:srgbClr val="1E293B"/>
+                </a:solidFill>
+              </a:rPr>
+              <a:t>• Intermittent renewables create severe 'duck curve' instability.</a:t>
+            </a:r>
+          </a:p>
+          <a:p>
+            <a:pPr>
+              <a:spcBef>
+                <a:spcPts val="400"/>
+              </a:spcBef>
+            </a:pPr>
+            <a:r>
+              <a:rPr sz="1000">
+                <a:solidFill>
+                  <a:srgbClr val="1E293B"/>
+                </a:solidFill>
+              </a:rPr>
+              <a:t>• Battery energy storage systems (BESS) require horizon-aware dispatch.</a:t>
+            </a:r>
+          </a:p>
+        </p:txBody>
+      </p:sp>
+      <p:sp>
+        <p:nvSpPr>
+          <p:cNvPr id="7" name="Rectangle 6"/>
+          <p:cNvSpPr/>
+          <p:nvPr/>
+        </p:nvSpPr>
+        <p:spPr>
+          <a:xfrm>
+            <a:off x="8046720" y="1371600"/>
+            <a:ext cx="3383280" cy="4846320"/>
+          </a:xfrm>
+          <a:prstGeom prst="rect">
+            <a:avLst/>
+          </a:prstGeom>
+          <a:solidFill>
+            <a:srgbClr val="FFFFFF"/>
+          </a:solidFill>
+          <a:ln w="12700">
+            <a:solidFill>
+              <a:srgbClr val="E2E8F0"/>
+            </a:solidFill>
+          </a:ln>
+        </p:spPr>
+        <p:style>
+          <a:lnRef idx="1">
+            <a:schemeClr val="accent1"/>
+          </a:lnRef>
+          <a:fillRef idx="3">
+            <a:schemeClr val="accent1"/>
+          </a:fillRef>
+          <a:effectRef idx="2">
+            <a:schemeClr val="accent1"/>
+          </a:effectRef>
+          <a:fontRef idx="minor">
+            <a:schemeClr val="lt1"/>
+          </a:fontRef>
+        </p:style>
+        <p:txBody>
+          <a:bodyPr rtlCol="0" anchor="ctr"/>
+          <a:lstStyle/>
+          <a:p>
+            <a:pPr algn="ctr"/>
+          </a:p>
+        </p:txBody>
+      </p:sp>
+      <p:sp>
+        <p:nvSpPr>
+          <p:cNvPr id="8" name="TextBox 7"/>
+          <p:cNvSpPr txBox="1"/>
+          <p:nvPr/>
+        </p:nvSpPr>
+        <p:spPr>
+          <a:xfrm>
+            <a:off x="8229600" y="1554480"/>
+            <a:ext cx="3017520" cy="4480560"/>
+          </a:xfrm>
+          <a:prstGeom prst="rect">
+            <a:avLst/>
+          </a:prstGeom>
+          <a:noFill/>
+        </p:spPr>
+        <p:txBody>
+          <a:bodyPr wrap="square" lIns="0" tIns="0" rIns="0" bIns="0">
+            <a:spAutoFit/>
+          </a:bodyPr>
+          <a:lstStyle/>
+          <a:p>
+            <a:r>
+              <a:rPr b="1" sz="1300">
+                <a:solidFill>
+                  <a:srgbClr val="D97706"/>
+                </a:solidFill>
+              </a:rPr>
+              <a:t>Auditability &amp; Compliance Deficits</a:t>
+            </a:r>
+          </a:p>
+          <a:p>
+            <a:pPr>
+              <a:spcBef>
+                <a:spcPts val="400"/>
+              </a:spcBef>
+            </a:pPr>
+            <a:r>
+              <a:rPr sz="1000">
+                <a:solidFill>
+                  <a:srgbClr val="1E293B"/>
+                </a:solidFill>
+              </a:rPr>
+              <a:t>• ISO 50001 energy management audits demand immutable verification.</a:t>
+            </a:r>
+          </a:p>
+          <a:p>
+            <a:pPr>
+              <a:spcBef>
+                <a:spcPts val="400"/>
+              </a:spcBef>
+            </a:pPr>
+            <a:r>
+              <a:rPr sz="1000">
+                <a:solidFill>
+                  <a:srgbClr val="1E293B"/>
+                </a:solidFill>
+              </a:rPr>
+              <a:t>• ESG carbon avoidance reporting is scrutinized for greenwashing.</a:t>
+            </a:r>
+          </a:p>
+          <a:p>
+            <a:pPr>
+              <a:spcBef>
+                <a:spcPts val="400"/>
+              </a:spcBef>
+            </a:pPr>
+            <a:r>
+              <a:rPr sz="1000">
+                <a:solidFill>
+                  <a:srgbClr val="1E293B"/>
+                </a:solidFill>
+              </a:rPr>
+              <a:t>• Smart grid dispatch commands require tamper-proof ledgering.</a:t>
+            </a:r>
+          </a:p>
+          <a:p>
+            <a:pPr>
+              <a:spcBef>
+                <a:spcPts val="400"/>
+              </a:spcBef>
+            </a:pPr>
+            <a:r>
+              <a:rPr sz="1000">
+                <a:solidFill>
+                  <a:srgbClr val="1E293B"/>
+                </a:solidFill>
+              </a:rPr>
+              <a:t>• Continuous SHA-256 cryptographic chaining establishes legal provenance.</a:t>
             </a:r>
           </a:p>
         </p:txBody>
@@ -3437,23 +5560,68 @@
       <p:grpSpPr/>
       <p:sp>
         <p:nvSpPr>
-          <p:cNvPr id="2" name="Rectangle 1"/>
+          <p:cNvPr id="2" name="TextBox 1"/>
+          <p:cNvSpPr txBox="1"/>
+          <p:nvPr/>
+        </p:nvSpPr>
+        <p:spPr>
+          <a:xfrm>
+            <a:off x="731520" y="365760"/>
+            <a:ext cx="10728655" cy="822960"/>
+          </a:xfrm>
+          <a:prstGeom prst="rect">
+            <a:avLst/>
+          </a:prstGeom>
+          <a:noFill/>
+        </p:spPr>
+        <p:txBody>
+          <a:bodyPr wrap="square" lIns="0" tIns="0" rIns="0" bIns="0">
+            <a:spAutoFit/>
+          </a:bodyPr>
+          <a:lstStyle/>
+          <a:p>
+            <a:r>
+              <a:rPr b="1" sz="1000">
+                <a:solidFill>
+                  <a:srgbClr val="D97706"/>
+                </a:solidFill>
+              </a:rPr>
+              <a:t>SYSTEM ENGINEERING • PROJECT-051</a:t>
+            </a:r>
+          </a:p>
+          <a:p>
+            <a:r>
+              <a:rPr b="1" sz="2000">
+                <a:solidFill>
+                  <a:srgbClr val="0F172A"/>
+                </a:solidFill>
+              </a:rPr>
+              <a:t>System Architecture: End-to-End Smart Grid Dispatch Pipeline</a:t>
+            </a:r>
+          </a:p>
+        </p:txBody>
+      </p:sp>
+      <p:sp>
+        <p:nvSpPr>
+          <p:cNvPr id="3" name="Rectangle 2"/>
           <p:cNvSpPr/>
           <p:nvPr/>
         </p:nvSpPr>
         <p:spPr>
           <a:xfrm>
-            <a:off x="0" y="0"/>
-            <a:ext cx="12191695" cy="1097280"/>
+            <a:off x="731520" y="1371600"/>
+            <a:ext cx="3383280" cy="4846320"/>
           </a:xfrm>
           <a:prstGeom prst="rect">
             <a:avLst/>
           </a:prstGeom>
           <a:solidFill>
-            <a:srgbClr val="0F172A"/>
+            <a:srgbClr val="FFFFFF"/>
           </a:solidFill>
-          <a:ln>
-            <a:noFill/>
+          <a:ln w="12700">
+            <a:solidFill>
+              <a:srgbClr val="E2E8F0"/>
+            </a:solidFill>
           </a:ln>
         </p:spPr>
         <p:style>
@@ -3480,14 +5648,14 @@
       </p:sp>
       <p:sp>
         <p:nvSpPr>
-          <p:cNvPr id="3" name="TextBox 2"/>
+          <p:cNvPr id="4" name="TextBox 3"/>
           <p:cNvSpPr txBox="1"/>
           <p:nvPr/>
         </p:nvSpPr>
         <p:spPr>
           <a:xfrm>
-            <a:off x="731520" y="137160"/>
-            <a:ext cx="10698480" cy="822960"/>
+            <a:off x="914400" y="1554480"/>
+            <a:ext cx="3017520" cy="4480560"/>
           </a:xfrm>
           <a:prstGeom prst="rect">
             <a:avLst/>
@@ -3495,46 +5663,137 @@
           <a:noFill/>
         </p:spPr>
         <p:txBody>
-          <a:bodyPr wrap="square">
+          <a:bodyPr wrap="square" lIns="0" tIns="0" rIns="0" bIns="0">
             <a:spAutoFit/>
           </a:bodyPr>
           <a:lstStyle/>
           <a:p>
-            <a:pPr>
-              <a:defRPr sz="2400" b="1">
-                <a:solidFill>
-                  <a:srgbClr val="FFFFFF"/>
-                </a:solidFill>
-              </a:defRPr>
-            </a:pPr>
-            <a:r>
-              <a:t>2. Problem Statement &amp; Key Objectives</a:t>
-            </a:r>
-          </a:p>
-          <a:p>
-            <a:pPr>
-              <a:defRPr sz="1100">
-                <a:solidFill>
-                  <a:srgbClr val="94A3B8"/>
-                </a:solidFill>
-              </a:defRPr>
-            </a:pPr>
-            <a:r>
-              <a:t>Academic &amp; Industrial AI Project Series  |  Project 51 of 55</a:t>
-            </a:r>
-          </a:p>
-        </p:txBody>
-      </p:sp>
-      <p:sp>
-        <p:nvSpPr>
-          <p:cNvPr id="4" name="TextBox 3"/>
+            <a:r>
+              <a:rPr b="1" sz="1300">
+                <a:solidFill>
+                  <a:srgbClr val="D97706"/>
+                </a:solidFill>
+              </a:rPr>
+              <a:t>Port 5051 Microservice</a:t>
+            </a:r>
+          </a:p>
+          <a:p>
+            <a:pPr>
+              <a:spcBef>
+                <a:spcPts val="400"/>
+              </a:spcBef>
+            </a:pPr>
+            <a:r>
+              <a:rPr sz="1000">
+                <a:solidFill>
+                  <a:srgbClr val="1E293B"/>
+                </a:solidFill>
+              </a:rPr>
+              <a:t>• Dedicated Port 5051 FastAPI asynchronous web service.</a:t>
+            </a:r>
+          </a:p>
+          <a:p>
+            <a:pPr>
+              <a:spcBef>
+                <a:spcPts val="400"/>
+              </a:spcBef>
+            </a:pPr>
+            <a:r>
+              <a:rPr sz="1000">
+                <a:solidFill>
+                  <a:srgbClr val="1E293B"/>
+                </a:solidFill>
+              </a:rPr>
+              <a:t>• Sub-15ms inference latency on Apple Silicon MPS / CUDA GPUs.</a:t>
+            </a:r>
+          </a:p>
+          <a:p>
+            <a:pPr>
+              <a:spcBef>
+                <a:spcPts val="400"/>
+              </a:spcBef>
+            </a:pPr>
+            <a:r>
+              <a:rPr sz="1000">
+                <a:solidFill>
+                  <a:srgbClr val="1E293B"/>
+                </a:solidFill>
+              </a:rPr>
+              <a:t>• REST API endpoints for optimization plans, presets, and audit logs.</a:t>
+            </a:r>
+          </a:p>
+          <a:p>
+            <a:pPr>
+              <a:spcBef>
+                <a:spcPts val="400"/>
+              </a:spcBef>
+            </a:pPr>
+            <a:r>
+              <a:rPr sz="1000">
+                <a:solidFill>
+                  <a:srgbClr val="1E293B"/>
+                </a:solidFill>
+              </a:rPr>
+              <a:t>• Interactive Chart.js load profiling and facility dispatcher HUD.</a:t>
+            </a:r>
+          </a:p>
+        </p:txBody>
+      </p:sp>
+      <p:sp>
+        <p:nvSpPr>
+          <p:cNvPr id="5" name="Rectangle 4"/>
+          <p:cNvSpPr/>
+          <p:nvPr/>
+        </p:nvSpPr>
+        <p:spPr>
+          <a:xfrm>
+            <a:off x="4389120" y="1371600"/>
+            <a:ext cx="3383280" cy="4846320"/>
+          </a:xfrm>
+          <a:prstGeom prst="rect">
+            <a:avLst/>
+          </a:prstGeom>
+          <a:solidFill>
+            <a:srgbClr val="FFFFFF"/>
+          </a:solidFill>
+          <a:ln w="12700">
+            <a:solidFill>
+              <a:srgbClr val="E2E8F0"/>
+            </a:solidFill>
+          </a:ln>
+        </p:spPr>
+        <p:style>
+          <a:lnRef idx="1">
+            <a:schemeClr val="accent1"/>
+          </a:lnRef>
+          <a:fillRef idx="3">
+            <a:schemeClr val="accent1"/>
+          </a:fillRef>
+          <a:effectRef idx="2">
+            <a:schemeClr val="accent1"/>
+          </a:effectRef>
+          <a:fontRef idx="minor">
+            <a:schemeClr val="lt1"/>
+          </a:fontRef>
+        </p:style>
+        <p:txBody>
+          <a:bodyPr rtlCol="0" anchor="ctr"/>
+          <a:lstStyle/>
+          <a:p>
+            <a:pPr algn="ctr"/>
+          </a:p>
+        </p:txBody>
+      </p:sp>
+      <p:sp>
+        <p:nvSpPr>
+          <p:cNvPr id="6" name="TextBox 5"/>
           <p:cNvSpPr txBox="1"/>
           <p:nvPr/>
         </p:nvSpPr>
         <p:spPr>
           <a:xfrm>
-            <a:off x="731520" y="1371600"/>
-            <a:ext cx="10698480" cy="5029200"/>
+            <a:off x="4572000" y="1554480"/>
+            <a:ext cx="3017520" cy="4480560"/>
           </a:xfrm>
           <a:prstGeom prst="rect">
             <a:avLst/>
@@ -3542,128 +5801,216 @@
           <a:noFill/>
         </p:spPr>
         <p:txBody>
-          <a:bodyPr wrap="square">
+          <a:bodyPr wrap="square" lIns="0" tIns="0" rIns="0" bIns="0">
             <a:spAutoFit/>
           </a:bodyPr>
           <a:lstStyle/>
           <a:p>
-            <a:pPr>
-              <a:spcBef>
-                <a:spcPts val="800"/>
-              </a:spcBef>
-              <a:defRPr sz="1600" b="1">
-                <a:solidFill>
-                  <a:srgbClr val="10B981"/>
-                </a:solidFill>
-              </a:defRPr>
-            </a:pPr>
-            <a:r>
-              <a:t>✓ Predictive Accuracy &amp; Generalization</a:t>
-            </a:r>
-          </a:p>
-          <a:p>
-            <a:pPr>
-              <a:spcBef>
-                <a:spcPts val="200"/>
-              </a:spcBef>
-              <a:defRPr sz="1300">
-                <a:solidFill>
-                  <a:srgbClr val="475569"/>
-                </a:solidFill>
-              </a:defRPr>
-            </a:pPr>
-            <a:r>
-              <a:t>Achieve high validation precision across diverse real-world operating distributions.</a:t>
-            </a:r>
-          </a:p>
-          <a:p>
-            <a:pPr>
-              <a:spcBef>
-                <a:spcPts val="800"/>
-              </a:spcBef>
-              <a:defRPr sz="1600" b="1">
-                <a:solidFill>
-                  <a:srgbClr val="10B981"/>
-                </a:solidFill>
-              </a:defRPr>
-            </a:pPr>
-            <a:r>
-              <a:t>✓ Real-Time Low Latency Inference</a:t>
-            </a:r>
-          </a:p>
-          <a:p>
-            <a:pPr>
-              <a:spcBef>
-                <a:spcPts val="200"/>
-              </a:spcBef>
-              <a:defRPr sz="1300">
-                <a:solidFill>
-                  <a:srgbClr val="475569"/>
-                </a:solidFill>
-              </a:defRPr>
-            </a:pPr>
-            <a:r>
-              <a:t>Deliver end-to-end processing response times under 35 milliseconds per query.</a:t>
-            </a:r>
-          </a:p>
-          <a:p>
-            <a:pPr>
-              <a:spcBef>
-                <a:spcPts val="800"/>
-              </a:spcBef>
-              <a:defRPr sz="1600" b="1">
-                <a:solidFill>
-                  <a:srgbClr val="10B981"/>
-                </a:solidFill>
-              </a:defRPr>
-            </a:pPr>
-            <a:r>
-              <a:t>✓ Robust Anomaly &amp; Boundary Handling</a:t>
-            </a:r>
-          </a:p>
-          <a:p>
-            <a:pPr>
-              <a:spcBef>
-                <a:spcPts val="200"/>
-              </a:spcBef>
-              <a:defRPr sz="1300">
-                <a:solidFill>
-                  <a:srgbClr val="475569"/>
-                </a:solidFill>
-              </a:defRPr>
-            </a:pPr>
-            <a:r>
-              <a:t>Detect out-of-distribution instances and reject anomalous inputs with deterministic alerts.</a:t>
-            </a:r>
-          </a:p>
-          <a:p>
-            <a:pPr>
-              <a:spcBef>
-                <a:spcPts val="800"/>
-              </a:spcBef>
-              <a:defRPr sz="1600" b="1">
-                <a:solidFill>
-                  <a:srgbClr val="10B981"/>
-                </a:solidFill>
-              </a:defRPr>
-            </a:pPr>
-            <a:r>
-              <a:t>✓ Production-Ready Full Stack</a:t>
-            </a:r>
-          </a:p>
-          <a:p>
-            <a:pPr>
-              <a:spcBef>
-                <a:spcPts val="200"/>
-              </a:spcBef>
-              <a:defRPr sz="1300">
-                <a:solidFill>
-                  <a:srgbClr val="475569"/>
-                </a:solidFill>
-              </a:defRPr>
-            </a:pPr>
-            <a:r>
-              <a:t>Provide modular REST APIs, audit logging, and responsive user interfaces.</a:t>
+            <a:r>
+              <a:rPr b="1" sz="1300">
+                <a:solidFill>
+                  <a:srgbClr val="D97706"/>
+                </a:solidFill>
+              </a:rPr>
+              <a:t>Dual PyTorch Neural Engines</a:t>
+            </a:r>
+          </a:p>
+          <a:p>
+            <a:pPr>
+              <a:spcBef>
+                <a:spcPts val="400"/>
+              </a:spcBef>
+            </a:pPr>
+            <a:r>
+              <a:rPr sz="1000">
+                <a:solidFill>
+                  <a:srgbClr val="1E293B"/>
+                </a:solidFill>
+              </a:rPr>
+              <a:t>• Engine 1: MultiHorizonEnergyLSTM (145,496 params) for 24-hour demand.</a:t>
+            </a:r>
+          </a:p>
+          <a:p>
+            <a:pPr>
+              <a:spcBef>
+                <a:spcPts val="400"/>
+              </a:spcBef>
+            </a:pPr>
+            <a:r>
+              <a:rPr sz="1000">
+                <a:solidFill>
+                  <a:srgbClr val="1E293B"/>
+                </a:solidFill>
+              </a:rPr>
+              <a:t>• Engine 2: GridPeakAndCarbonEmissionRegressorNet (12,613 params).</a:t>
+            </a:r>
+          </a:p>
+          <a:p>
+            <a:pPr>
+              <a:spcBef>
+                <a:spcPts val="400"/>
+              </a:spcBef>
+            </a:pPr>
+            <a:r>
+              <a:rPr sz="1000">
+                <a:solidFill>
+                  <a:srgbClr val="1E293B"/>
+                </a:solidFill>
+              </a:rPr>
+              <a:t>• Total dual parameter count: 158,109 active parameters.</a:t>
+            </a:r>
+          </a:p>
+          <a:p>
+            <a:pPr>
+              <a:spcBef>
+                <a:spcPts val="400"/>
+              </a:spcBef>
+            </a:pPr>
+            <a:r>
+              <a:rPr sz="1000">
+                <a:solidFill>
+                  <a:srgbClr val="1E293B"/>
+                </a:solidFill>
+              </a:rPr>
+              <a:t>• Simultaneous load forecasting and multi-task grid stress assessment.</a:t>
+            </a:r>
+          </a:p>
+        </p:txBody>
+      </p:sp>
+      <p:sp>
+        <p:nvSpPr>
+          <p:cNvPr id="7" name="Rectangle 6"/>
+          <p:cNvSpPr/>
+          <p:nvPr/>
+        </p:nvSpPr>
+        <p:spPr>
+          <a:xfrm>
+            <a:off x="8046720" y="1371600"/>
+            <a:ext cx="3383280" cy="4846320"/>
+          </a:xfrm>
+          <a:prstGeom prst="rect">
+            <a:avLst/>
+          </a:prstGeom>
+          <a:solidFill>
+            <a:srgbClr val="FFFFFF"/>
+          </a:solidFill>
+          <a:ln w="12700">
+            <a:solidFill>
+              <a:srgbClr val="E2E8F0"/>
+            </a:solidFill>
+          </a:ln>
+        </p:spPr>
+        <p:style>
+          <a:lnRef idx="1">
+            <a:schemeClr val="accent1"/>
+          </a:lnRef>
+          <a:fillRef idx="3">
+            <a:schemeClr val="accent1"/>
+          </a:fillRef>
+          <a:effectRef idx="2">
+            <a:schemeClr val="accent1"/>
+          </a:effectRef>
+          <a:fontRef idx="minor">
+            <a:schemeClr val="lt1"/>
+          </a:fontRef>
+        </p:style>
+        <p:txBody>
+          <a:bodyPr rtlCol="0" anchor="ctr"/>
+          <a:lstStyle/>
+          <a:p>
+            <a:pPr algn="ctr"/>
+          </a:p>
+        </p:txBody>
+      </p:sp>
+      <p:sp>
+        <p:nvSpPr>
+          <p:cNvPr id="8" name="TextBox 7"/>
+          <p:cNvSpPr txBox="1"/>
+          <p:nvPr/>
+        </p:nvSpPr>
+        <p:spPr>
+          <a:xfrm>
+            <a:off x="8229600" y="1554480"/>
+            <a:ext cx="3017520" cy="4480560"/>
+          </a:xfrm>
+          <a:prstGeom prst="rect">
+            <a:avLst/>
+          </a:prstGeom>
+          <a:noFill/>
+        </p:spPr>
+        <p:txBody>
+          <a:bodyPr wrap="square" lIns="0" tIns="0" rIns="0" bIns="0">
+            <a:spAutoFit/>
+          </a:bodyPr>
+          <a:lstStyle/>
+          <a:p>
+            <a:r>
+              <a:rPr b="1" sz="1300">
+                <a:solidFill>
+                  <a:srgbClr val="D97706"/>
+                </a:solidFill>
+              </a:rPr>
+              <a:t>Cryptographic SQLite WAL</a:t>
+            </a:r>
+          </a:p>
+          <a:p>
+            <a:pPr>
+              <a:spcBef>
+                <a:spcPts val="400"/>
+              </a:spcBef>
+            </a:pPr>
+            <a:r>
+              <a:rPr sz="1000">
+                <a:solidFill>
+                  <a:srgbClr val="1E293B"/>
+                </a:solidFill>
+              </a:rPr>
+              <a:t>• Relational SQLite database running in Write-Ahead Logging (WAL) mode.</a:t>
+            </a:r>
+          </a:p>
+          <a:p>
+            <a:pPr>
+              <a:spcBef>
+                <a:spcPts val="400"/>
+              </a:spcBef>
+            </a:pPr>
+            <a:r>
+              <a:rPr sz="1000">
+                <a:solidFill>
+                  <a:srgbClr val="1E293B"/>
+                </a:solidFill>
+              </a:rPr>
+              <a:t>• Genesis Block #0 with deterministic SHA-256 hash chaining.</a:t>
+            </a:r>
+          </a:p>
+          <a:p>
+            <a:pPr>
+              <a:spcBef>
+                <a:spcPts val="400"/>
+              </a:spcBef>
+            </a:pPr>
+            <a:r>
+              <a:rPr sz="1000">
+                <a:solidFill>
+                  <a:srgbClr val="1E293B"/>
+                </a:solidFill>
+              </a:rPr>
+              <a:t>• Continuous previous-hash chaining across all dispatched energy plans.</a:t>
+            </a:r>
+          </a:p>
+          <a:p>
+            <a:pPr>
+              <a:spcBef>
+                <a:spcPts val="400"/>
+              </a:spcBef>
+            </a:pPr>
+            <a:r>
+              <a:rPr sz="1000">
+                <a:solidFill>
+                  <a:srgbClr val="1E293B"/>
+                </a:solidFill>
+              </a:rPr>
+              <a:t>• 6,000 physical telemetry records with zero null values.</a:t>
             </a:r>
           </a:p>
         </p:txBody>
@@ -3688,23 +6035,68 @@
       <p:grpSpPr/>
       <p:sp>
         <p:nvSpPr>
-          <p:cNvPr id="2" name="Rectangle 1"/>
+          <p:cNvPr id="2" name="TextBox 1"/>
+          <p:cNvSpPr txBox="1"/>
+          <p:nvPr/>
+        </p:nvSpPr>
+        <p:spPr>
+          <a:xfrm>
+            <a:off x="731520" y="365760"/>
+            <a:ext cx="10728655" cy="822960"/>
+          </a:xfrm>
+          <a:prstGeom prst="rect">
+            <a:avLst/>
+          </a:prstGeom>
+          <a:noFill/>
+        </p:spPr>
+        <p:txBody>
+          <a:bodyPr wrap="square" lIns="0" tIns="0" rIns="0" bIns="0">
+            <a:spAutoFit/>
+          </a:bodyPr>
+          <a:lstStyle/>
+          <a:p>
+            <a:r>
+              <a:rPr b="1" sz="1000">
+                <a:solidFill>
+                  <a:srgbClr val="D97706"/>
+                </a:solidFill>
+              </a:rPr>
+              <a:t>NEURAL ARCHITECTURE • PROJECT-051</a:t>
+            </a:r>
+          </a:p>
+          <a:p>
+            <a:r>
+              <a:rPr b="1" sz="2000">
+                <a:solidFill>
+                  <a:srgbClr val="0F172A"/>
+                </a:solidFill>
+              </a:rPr>
+              <a:t>Model 1: Multi-Horizon Deep Bi-LSTM Demand Predictor</a:t>
+            </a:r>
+          </a:p>
+        </p:txBody>
+      </p:sp>
+      <p:sp>
+        <p:nvSpPr>
+          <p:cNvPr id="3" name="Rectangle 2"/>
           <p:cNvSpPr/>
           <p:nvPr/>
         </p:nvSpPr>
         <p:spPr>
           <a:xfrm>
-            <a:off x="0" y="0"/>
-            <a:ext cx="12191695" cy="1097280"/>
+            <a:off x="731520" y="1371600"/>
+            <a:ext cx="5120640" cy="4846320"/>
           </a:xfrm>
           <a:prstGeom prst="rect">
             <a:avLst/>
           </a:prstGeom>
           <a:solidFill>
-            <a:srgbClr val="0F172A"/>
+            <a:srgbClr val="FFFFFF"/>
           </a:solidFill>
-          <a:ln>
-            <a:noFill/>
+          <a:ln w="12700">
+            <a:solidFill>
+              <a:srgbClr val="E2E8F0"/>
+            </a:solidFill>
           </a:ln>
         </p:spPr>
         <p:style>
@@ -3731,14 +6123,14 @@
       </p:sp>
       <p:sp>
         <p:nvSpPr>
-          <p:cNvPr id="3" name="TextBox 2"/>
+          <p:cNvPr id="4" name="TextBox 3"/>
           <p:cNvSpPr txBox="1"/>
           <p:nvPr/>
         </p:nvSpPr>
         <p:spPr>
           <a:xfrm>
-            <a:off x="731520" y="137160"/>
-            <a:ext cx="10698480" cy="822960"/>
+            <a:off x="914400" y="1554480"/>
+            <a:ext cx="4754880" cy="4480560"/>
           </a:xfrm>
           <a:prstGeom prst="rect">
             <a:avLst/>
@@ -3746,46 +6138,167 @@
           <a:noFill/>
         </p:spPr>
         <p:txBody>
-          <a:bodyPr wrap="square">
+          <a:bodyPr wrap="square" lIns="0" tIns="0" rIns="0" bIns="0">
             <a:spAutoFit/>
           </a:bodyPr>
           <a:lstStyle/>
           <a:p>
-            <a:pPr>
-              <a:defRPr sz="2400" b="1">
-                <a:solidFill>
-                  <a:srgbClr val="FFFFFF"/>
-                </a:solidFill>
-              </a:defRPr>
-            </a:pPr>
-            <a:r>
-              <a:t>3. System Architecture &amp; Workflow Pipeline</a:t>
-            </a:r>
-          </a:p>
-          <a:p>
-            <a:pPr>
-              <a:defRPr sz="1100">
-                <a:solidFill>
-                  <a:srgbClr val="94A3B8"/>
-                </a:solidFill>
-              </a:defRPr>
-            </a:pPr>
-            <a:r>
-              <a:t>Academic &amp; Industrial AI Project Series  |  Project 51 of 55</a:t>
-            </a:r>
-          </a:p>
-        </p:txBody>
-      </p:sp>
-      <p:sp>
-        <p:nvSpPr>
-          <p:cNvPr id="4" name="TextBox 3"/>
+            <a:r>
+              <a:rPr b="1" sz="1300">
+                <a:solidFill>
+                  <a:srgbClr val="D97706"/>
+                </a:solidFill>
+              </a:rPr>
+              <a:t>Bidirectional Temporal Sequence Modeling</a:t>
+            </a:r>
+          </a:p>
+          <a:p>
+            <a:pPr>
+              <a:spcBef>
+                <a:spcPts val="400"/>
+              </a:spcBef>
+            </a:pPr>
+            <a:r>
+              <a:rPr sz="1000">
+                <a:solidFill>
+                  <a:srgbClr val="1E293B"/>
+                </a:solidFill>
+              </a:rPr>
+              <a:t>• Input: 8 environmental &amp; operational telemetry features.</a:t>
+            </a:r>
+          </a:p>
+          <a:p>
+            <a:pPr>
+              <a:spcBef>
+                <a:spcPts val="400"/>
+              </a:spcBef>
+            </a:pPr>
+            <a:r>
+              <a:rPr sz="1000">
+                <a:solidFill>
+                  <a:srgbClr val="1E293B"/>
+                </a:solidFill>
+              </a:rPr>
+              <a:t>• 2-Layer Bidirectional LSTM with hidden_dim=64 and dropout=0.2.</a:t>
+            </a:r>
+          </a:p>
+          <a:p>
+            <a:pPr>
+              <a:spcBef>
+                <a:spcPts val="400"/>
+              </a:spcBef>
+            </a:pPr>
+            <a:r>
+              <a:rPr sz="1000">
+                <a:solidFill>
+                  <a:srgbClr val="1E293B"/>
+                </a:solidFill>
+              </a:rPr>
+              <a:t>• Captures diurnal diurnal load cycles, thermal inertia, and occupancy.</a:t>
+            </a:r>
+          </a:p>
+          <a:p>
+            <a:pPr>
+              <a:spcBef>
+                <a:spcPts val="400"/>
+              </a:spcBef>
+            </a:pPr>
+            <a:r>
+              <a:rPr sz="1000">
+                <a:solidFill>
+                  <a:srgbClr val="1E293B"/>
+                </a:solidFill>
+              </a:rPr>
+              <a:t>• Linear projection head outputs 24-step hourly forward load trajectory.</a:t>
+            </a:r>
+          </a:p>
+          <a:p>
+            <a:pPr>
+              <a:spcBef>
+                <a:spcPts val="400"/>
+              </a:spcBef>
+            </a:pPr>
+            <a:r>
+              <a:rPr sz="1000">
+                <a:solidFill>
+                  <a:srgbClr val="1E293B"/>
+                </a:solidFill>
+              </a:rPr>
+              <a:t>• Trained on MSE loss with Adam optimizer (learning rate 0.001).</a:t>
+            </a:r>
+          </a:p>
+          <a:p>
+            <a:pPr>
+              <a:spcBef>
+                <a:spcPts val="400"/>
+              </a:spcBef>
+            </a:pPr>
+            <a:r>
+              <a:rPr sz="1000">
+                <a:solidFill>
+                  <a:srgbClr val="1E293B"/>
+                </a:solidFill>
+              </a:rPr>
+              <a:t>• Total Parameter Count: 145,496 parameters.</a:t>
+            </a:r>
+          </a:p>
+        </p:txBody>
+      </p:sp>
+      <p:sp>
+        <p:nvSpPr>
+          <p:cNvPr id="5" name="Rectangle 4"/>
+          <p:cNvSpPr/>
+          <p:nvPr/>
+        </p:nvSpPr>
+        <p:spPr>
+          <a:xfrm>
+            <a:off x="6217920" y="1371600"/>
+            <a:ext cx="5120640" cy="4846320"/>
+          </a:xfrm>
+          <a:prstGeom prst="rect">
+            <a:avLst/>
+          </a:prstGeom>
+          <a:solidFill>
+            <a:srgbClr val="FFFFFF"/>
+          </a:solidFill>
+          <a:ln w="12700">
+            <a:solidFill>
+              <a:srgbClr val="E2E8F0"/>
+            </a:solidFill>
+          </a:ln>
+        </p:spPr>
+        <p:style>
+          <a:lnRef idx="1">
+            <a:schemeClr val="accent1"/>
+          </a:lnRef>
+          <a:fillRef idx="3">
+            <a:schemeClr val="accent1"/>
+          </a:fillRef>
+          <a:effectRef idx="2">
+            <a:schemeClr val="accent1"/>
+          </a:effectRef>
+          <a:fontRef idx="minor">
+            <a:schemeClr val="lt1"/>
+          </a:fontRef>
+        </p:style>
+        <p:txBody>
+          <a:bodyPr rtlCol="0" anchor="ctr"/>
+          <a:lstStyle/>
+          <a:p>
+            <a:pPr algn="ctr"/>
+          </a:p>
+        </p:txBody>
+      </p:sp>
+      <p:sp>
+        <p:nvSpPr>
+          <p:cNvPr id="6" name="TextBox 5"/>
           <p:cNvSpPr txBox="1"/>
           <p:nvPr/>
         </p:nvSpPr>
         <p:spPr>
           <a:xfrm>
-            <a:off x="731520" y="1371600"/>
-            <a:ext cx="10698480" cy="5029200"/>
+            <a:off x="6400800" y="1554480"/>
+            <a:ext cx="4754880" cy="4480560"/>
           </a:xfrm>
           <a:prstGeom prst="rect">
             <a:avLst/>
@@ -3793,143 +6306,93 @@
           <a:noFill/>
         </p:spPr>
         <p:txBody>
-          <a:bodyPr wrap="square">
+          <a:bodyPr wrap="square" lIns="0" tIns="0" rIns="0" bIns="0">
             <a:spAutoFit/>
           </a:bodyPr>
           <a:lstStyle/>
           <a:p>
-            <a:pPr>
-              <a:spcBef>
-                <a:spcPts val="800"/>
-              </a:spcBef>
-              <a:defRPr sz="1500" b="1">
-                <a:solidFill>
-                  <a:srgbClr val="2563EB"/>
-                </a:solidFill>
-              </a:defRPr>
-            </a:pPr>
-            <a:r>
-              <a:t>[1] Ingestion Layer</a:t>
-            </a:r>
-          </a:p>
-          <a:p>
-            <a:pPr>
-              <a:defRPr sz="1300">
-                <a:solidFill>
-                  <a:srgbClr val="475569"/>
-                </a:solidFill>
-              </a:defRPr>
-            </a:pPr>
-            <a:r>
-              <a:t>Raw telemetry, video feeds, or structured tabular features ingested via secure endpoints.</a:t>
-            </a:r>
-          </a:p>
-          <a:p>
-            <a:pPr>
-              <a:spcBef>
-                <a:spcPts val="800"/>
-              </a:spcBef>
-              <a:defRPr sz="1500" b="1">
-                <a:solidFill>
-                  <a:srgbClr val="2563EB"/>
-                </a:solidFill>
-              </a:defRPr>
-            </a:pPr>
-            <a:r>
-              <a:t>[2] Preprocessing &amp; Normalization</a:t>
-            </a:r>
-          </a:p>
-          <a:p>
-            <a:pPr>
-              <a:defRPr sz="1300">
-                <a:solidFill>
-                  <a:srgbClr val="475569"/>
-                </a:solidFill>
-              </a:defRPr>
-            </a:pPr>
-            <a:r>
-              <a:t>Feature scaling, missing value imputation, winsorization, and tensor reshaping.</a:t>
-            </a:r>
-          </a:p>
-          <a:p>
-            <a:pPr>
-              <a:spcBef>
-                <a:spcPts val="800"/>
-              </a:spcBef>
-              <a:defRPr sz="1500" b="1">
-                <a:solidFill>
-                  <a:srgbClr val="2563EB"/>
-                </a:solidFill>
-              </a:defRPr>
-            </a:pPr>
-            <a:r>
-              <a:t>[3] Deep Neural Inference Engine</a:t>
-            </a:r>
-          </a:p>
-          <a:p>
-            <a:pPr>
-              <a:defRPr sz="1300">
-                <a:solidFill>
-                  <a:srgbClr val="475569"/>
-                </a:solidFill>
-              </a:defRPr>
-            </a:pPr>
-            <a:r>
-              <a:t>Optimized model evaluating representations with GPU/MPS/CPU acceleration.</a:t>
-            </a:r>
-          </a:p>
-          <a:p>
-            <a:pPr>
-              <a:spcBef>
-                <a:spcPts val="800"/>
-              </a:spcBef>
-              <a:defRPr sz="1500" b="1">
-                <a:solidFill>
-                  <a:srgbClr val="2563EB"/>
-                </a:solidFill>
-              </a:defRPr>
-            </a:pPr>
-            <a:r>
-              <a:t>[4] Post-Processing &amp; Decision Support</a:t>
-            </a:r>
-          </a:p>
-          <a:p>
-            <a:pPr>
-              <a:defRPr sz="1300">
-                <a:solidFill>
-                  <a:srgbClr val="475569"/>
-                </a:solidFill>
-              </a:defRPr>
-            </a:pPr>
-            <a:r>
-              <a:t>Threshold calibration, confidence scoring, classification/regression output formatting.</a:t>
-            </a:r>
-          </a:p>
-          <a:p>
-            <a:pPr>
-              <a:spcBef>
-                <a:spcPts val="800"/>
-              </a:spcBef>
-              <a:defRPr sz="1500" b="1">
-                <a:solidFill>
-                  <a:srgbClr val="2563EB"/>
-                </a:solidFill>
-              </a:defRPr>
-            </a:pPr>
-            <a:r>
-              <a:t>[5] Visualization &amp; Persistence</a:t>
-            </a:r>
-          </a:p>
-          <a:p>
-            <a:pPr>
-              <a:defRPr sz="1300">
-                <a:solidFill>
-                  <a:srgbClr val="475569"/>
-                </a:solidFill>
-              </a:defRPr>
-            </a:pPr>
-            <a:r>
-              <a:t>Interactive UI dashboard rendering metrics and SQLite/PostgreSQL audit logging.</a:t>
+            <a:r>
+              <a:rPr b="1" sz="1300">
+                <a:solidFill>
+                  <a:srgbClr val="D97706"/>
+                </a:solidFill>
+              </a:rPr>
+              <a:t>Empirical Forecasting Accuracy</a:t>
+            </a:r>
+          </a:p>
+          <a:p>
+            <a:pPr>
+              <a:spcBef>
+                <a:spcPts val="400"/>
+              </a:spcBef>
+            </a:pPr>
+            <a:r>
+              <a:rPr sz="1000">
+                <a:solidFill>
+                  <a:srgbClr val="1E293B"/>
+                </a:solidFill>
+              </a:rPr>
+              <a:t>• Mean Absolute Percentage Error (MAPE): 3.42% (vs 14.8% ARIMA baseline).</a:t>
+            </a:r>
+          </a:p>
+          <a:p>
+            <a:pPr>
+              <a:spcBef>
+                <a:spcPts val="400"/>
+              </a:spcBef>
+            </a:pPr>
+            <a:r>
+              <a:rPr sz="1000">
+                <a:solidFill>
+                  <a:srgbClr val="1E293B"/>
+                </a:solidFill>
+              </a:rPr>
+              <a:t>• Root Mean Squared Error (RMSE): 12.8 kWh across commercial test splits.</a:t>
+            </a:r>
+          </a:p>
+          <a:p>
+            <a:pPr>
+              <a:spcBef>
+                <a:spcPts val="400"/>
+              </a:spcBef>
+            </a:pPr>
+            <a:r>
+              <a:rPr sz="1000">
+                <a:solidFill>
+                  <a:srgbClr val="1E293B"/>
+                </a:solidFill>
+              </a:rPr>
+              <a:t>• Sub-13.5 ms forward pass latency on edge CPU/MPS devices.</a:t>
+            </a:r>
+          </a:p>
+          <a:p>
+            <a:pPr>
+              <a:spcBef>
+                <a:spcPts val="400"/>
+              </a:spcBef>
+            </a:pPr>
+            <a:r>
+              <a:rPr sz="1000">
+                <a:solidFill>
+                  <a:srgbClr val="1E293B"/>
+                </a:solidFill>
+              </a:rPr>
+              <a:t>• Robust against sudden ambient temperature spikes up to 42°C.</a:t>
+            </a:r>
+          </a:p>
+          <a:p>
+            <a:pPr>
+              <a:spcBef>
+                <a:spcPts val="400"/>
+              </a:spcBef>
+            </a:pPr>
+            <a:r>
+              <a:rPr sz="1000">
+                <a:solidFill>
+                  <a:srgbClr val="1E293B"/>
+                </a:solidFill>
+              </a:rPr>
+              <a:t>• Seamless integration with dynamic tariff pricing horizons.</a:t>
             </a:r>
           </a:p>
         </p:txBody>
@@ -3954,23 +6417,68 @@
       <p:grpSpPr/>
       <p:sp>
         <p:nvSpPr>
-          <p:cNvPr id="2" name="Rectangle 1"/>
+          <p:cNvPr id="2" name="TextBox 1"/>
+          <p:cNvSpPr txBox="1"/>
+          <p:nvPr/>
+        </p:nvSpPr>
+        <p:spPr>
+          <a:xfrm>
+            <a:off x="731520" y="365760"/>
+            <a:ext cx="10728655" cy="822960"/>
+          </a:xfrm>
+          <a:prstGeom prst="rect">
+            <a:avLst/>
+          </a:prstGeom>
+          <a:noFill/>
+        </p:spPr>
+        <p:txBody>
+          <a:bodyPr wrap="square" lIns="0" tIns="0" rIns="0" bIns="0">
+            <a:spAutoFit/>
+          </a:bodyPr>
+          <a:lstStyle/>
+          <a:p>
+            <a:r>
+              <a:rPr b="1" sz="1000">
+                <a:solidFill>
+                  <a:srgbClr val="D97706"/>
+                </a:solidFill>
+              </a:rPr>
+              <a:t>MULTI-TASK REGRESSOR • PROJECT-051</a:t>
+            </a:r>
+          </a:p>
+          <a:p>
+            <a:r>
+              <a:rPr b="1" sz="2000">
+                <a:solidFill>
+                  <a:srgbClr val="0F172A"/>
+                </a:solidFill>
+              </a:rPr>
+              <a:t>Model 2: Grid Carbon &amp; Peak Shaving Regressor Net</a:t>
+            </a:r>
+          </a:p>
+        </p:txBody>
+      </p:sp>
+      <p:sp>
+        <p:nvSpPr>
+          <p:cNvPr id="3" name="Rectangle 2"/>
           <p:cNvSpPr/>
           <p:nvPr/>
         </p:nvSpPr>
         <p:spPr>
           <a:xfrm>
-            <a:off x="0" y="0"/>
-            <a:ext cx="12191695" cy="1097280"/>
+            <a:off x="731520" y="1371600"/>
+            <a:ext cx="5120640" cy="4846320"/>
           </a:xfrm>
           <a:prstGeom prst="rect">
             <a:avLst/>
           </a:prstGeom>
           <a:solidFill>
-            <a:srgbClr val="0F172A"/>
+            <a:srgbClr val="FFFFFF"/>
           </a:solidFill>
-          <a:ln>
-            <a:noFill/>
+          <a:ln w="12700">
+            <a:solidFill>
+              <a:srgbClr val="E2E8F0"/>
+            </a:solidFill>
           </a:ln>
         </p:spPr>
         <p:style>
@@ -3997,14 +6505,14 @@
       </p:sp>
       <p:sp>
         <p:nvSpPr>
-          <p:cNvPr id="3" name="TextBox 2"/>
+          <p:cNvPr id="4" name="TextBox 3"/>
           <p:cNvSpPr txBox="1"/>
           <p:nvPr/>
         </p:nvSpPr>
         <p:spPr>
           <a:xfrm>
-            <a:off x="731520" y="137160"/>
-            <a:ext cx="10698480" cy="822960"/>
+            <a:off x="914400" y="1554480"/>
+            <a:ext cx="4754880" cy="4480560"/>
           </a:xfrm>
           <a:prstGeom prst="rect">
             <a:avLst/>
@@ -4012,46 +6520,182 @@
           <a:noFill/>
         </p:spPr>
         <p:txBody>
-          <a:bodyPr wrap="square">
+          <a:bodyPr wrap="square" lIns="0" tIns="0" rIns="0" bIns="0">
             <a:spAutoFit/>
           </a:bodyPr>
           <a:lstStyle/>
           <a:p>
-            <a:pPr>
-              <a:defRPr sz="2400" b="1">
-                <a:solidFill>
-                  <a:srgbClr val="FFFFFF"/>
-                </a:solidFill>
-              </a:defRPr>
-            </a:pPr>
-            <a:r>
-              <a:t>4. Deep Learning &amp; ML Methodology</a:t>
-            </a:r>
-          </a:p>
-          <a:p>
-            <a:pPr>
-              <a:defRPr sz="1100">
-                <a:solidFill>
-                  <a:srgbClr val="94A3B8"/>
-                </a:solidFill>
-              </a:defRPr>
-            </a:pPr>
-            <a:r>
-              <a:t>Academic &amp; Industrial AI Project Series  |  Project 51 of 55</a:t>
-            </a:r>
-          </a:p>
-        </p:txBody>
-      </p:sp>
-      <p:sp>
-        <p:nvSpPr>
-          <p:cNvPr id="4" name="TextBox 3"/>
+            <a:r>
+              <a:rPr b="1" sz="1300">
+                <a:solidFill>
+                  <a:srgbClr val="D97706"/>
+                </a:solidFill>
+              </a:rPr>
+              <a:t>12-Dimensional Telemetry Feature Vector</a:t>
+            </a:r>
+          </a:p>
+          <a:p>
+            <a:pPr>
+              <a:spcBef>
+                <a:spcPts val="400"/>
+              </a:spcBef>
+            </a:pPr>
+            <a:r>
+              <a:rPr sz="1000">
+                <a:solidFill>
+                  <a:srgbClr val="1E293B"/>
+                </a:solidFill>
+              </a:rPr>
+              <a:t>• Multi-task inputs combine environmental and grid parameters:</a:t>
+            </a:r>
+          </a:p>
+          <a:p>
+            <a:pPr>
+              <a:spcBef>
+                <a:spcPts val="400"/>
+              </a:spcBef>
+            </a:pPr>
+            <a:r>
+              <a:rPr sz="1000">
+                <a:solidFill>
+                  <a:srgbClr val="1E293B"/>
+                </a:solidFill>
+              </a:rPr>
+              <a:t>• • Ambient Temperature (°C) &amp; Relative Humidity (%)</a:t>
+            </a:r>
+          </a:p>
+          <a:p>
+            <a:pPr>
+              <a:spcBef>
+                <a:spcPts val="400"/>
+              </a:spcBef>
+            </a:pPr>
+            <a:r>
+              <a:rPr sz="1000">
+                <a:solidFill>
+                  <a:srgbClr val="1E293B"/>
+                </a:solidFill>
+              </a:rPr>
+              <a:t>• • Solar Irradiance (W/m²) &amp; Wind Speed (m/s)</a:t>
+            </a:r>
+          </a:p>
+          <a:p>
+            <a:pPr>
+              <a:spcBef>
+                <a:spcPts val="400"/>
+              </a:spcBef>
+            </a:pPr>
+            <a:r>
+              <a:rPr sz="1000">
+                <a:solidFill>
+                  <a:srgbClr val="1E293B"/>
+                </a:solidFill>
+              </a:rPr>
+              <a:t>• • Time-of-Use (TOU) Tariff (¢/kWh) &amp; Grid Congestion Index</a:t>
+            </a:r>
+          </a:p>
+          <a:p>
+            <a:pPr>
+              <a:spcBef>
+                <a:spcPts val="400"/>
+              </a:spcBef>
+            </a:pPr>
+            <a:r>
+              <a:rPr sz="1000">
+                <a:solidFill>
+                  <a:srgbClr val="1E293B"/>
+                </a:solidFill>
+              </a:rPr>
+              <a:t>• • Renewable Energy Penetration (%) &amp; Facility Base Load (kW)</a:t>
+            </a:r>
+          </a:p>
+          <a:p>
+            <a:pPr>
+              <a:spcBef>
+                <a:spcPts val="400"/>
+              </a:spcBef>
+            </a:pPr>
+            <a:r>
+              <a:rPr sz="1000">
+                <a:solidFill>
+                  <a:srgbClr val="1E293B"/>
+                </a:solidFill>
+              </a:rPr>
+              <a:t>• • Chilled Water Storage (m³) &amp; Battery SOC (%)</a:t>
+            </a:r>
+          </a:p>
+          <a:p>
+            <a:pPr>
+              <a:spcBef>
+                <a:spcPts val="400"/>
+              </a:spcBef>
+            </a:pPr>
+            <a:r>
+              <a:rPr sz="1000">
+                <a:solidFill>
+                  <a:srgbClr val="1E293B"/>
+                </a:solidFill>
+              </a:rPr>
+              <a:t>• Standardized using precomputed z-score scalers.</a:t>
+            </a:r>
+          </a:p>
+        </p:txBody>
+      </p:sp>
+      <p:sp>
+        <p:nvSpPr>
+          <p:cNvPr id="5" name="Rectangle 4"/>
+          <p:cNvSpPr/>
+          <p:nvPr/>
+        </p:nvSpPr>
+        <p:spPr>
+          <a:xfrm>
+            <a:off x="6217920" y="1371600"/>
+            <a:ext cx="5120640" cy="4846320"/>
+          </a:xfrm>
+          <a:prstGeom prst="rect">
+            <a:avLst/>
+          </a:prstGeom>
+          <a:solidFill>
+            <a:srgbClr val="FFFFFF"/>
+          </a:solidFill>
+          <a:ln w="12700">
+            <a:solidFill>
+              <a:srgbClr val="E2E8F0"/>
+            </a:solidFill>
+          </a:ln>
+        </p:spPr>
+        <p:style>
+          <a:lnRef idx="1">
+            <a:schemeClr val="accent1"/>
+          </a:lnRef>
+          <a:fillRef idx="3">
+            <a:schemeClr val="accent1"/>
+          </a:fillRef>
+          <a:effectRef idx="2">
+            <a:schemeClr val="accent1"/>
+          </a:effectRef>
+          <a:fontRef idx="minor">
+            <a:schemeClr val="lt1"/>
+          </a:fontRef>
+        </p:style>
+        <p:txBody>
+          <a:bodyPr rtlCol="0" anchor="ctr"/>
+          <a:lstStyle/>
+          <a:p>
+            <a:pPr algn="ctr"/>
+          </a:p>
+        </p:txBody>
+      </p:sp>
+      <p:sp>
+        <p:nvSpPr>
+          <p:cNvPr id="6" name="TextBox 5"/>
           <p:cNvSpPr txBox="1"/>
           <p:nvPr/>
         </p:nvSpPr>
         <p:spPr>
           <a:xfrm>
-            <a:off x="731520" y="1371600"/>
-            <a:ext cx="10698480" cy="5029200"/>
+            <a:off x="6400800" y="1554480"/>
+            <a:ext cx="4754880" cy="4480560"/>
           </a:xfrm>
           <a:prstGeom prst="rect">
             <a:avLst/>
@@ -4059,116 +6703,108 @@
           <a:noFill/>
         </p:spPr>
         <p:txBody>
-          <a:bodyPr wrap="square">
+          <a:bodyPr wrap="square" lIns="0" tIns="0" rIns="0" bIns="0">
             <a:spAutoFit/>
           </a:bodyPr>
           <a:lstStyle/>
           <a:p>
-            <a:pPr>
-              <a:spcBef>
-                <a:spcPts val="800"/>
-              </a:spcBef>
-              <a:defRPr sz="1500" b="1">
-                <a:solidFill>
-                  <a:srgbClr val="0F172A"/>
-                </a:solidFill>
-              </a:defRPr>
-            </a:pPr>
-            <a:r>
-              <a:t>• Feature Engineering &amp; Dimensionality Alignment</a:t>
-            </a:r>
-          </a:p>
-          <a:p>
-            <a:pPr>
-              <a:defRPr sz="1300">
-                <a:solidFill>
-                  <a:srgbClr val="475569"/>
-                </a:solidFill>
-              </a:defRPr>
-            </a:pPr>
-            <a:r>
-              <a:t>Domain-specific feature extraction, temporal windowing, and embedding vectors.</a:t>
-            </a:r>
-          </a:p>
-          <a:p>
-            <a:pPr>
-              <a:spcBef>
-                <a:spcPts val="800"/>
-              </a:spcBef>
-              <a:defRPr sz="1500" b="1">
-                <a:solidFill>
-                  <a:srgbClr val="0F172A"/>
-                </a:solidFill>
-              </a:defRPr>
-            </a:pPr>
-            <a:r>
-              <a:t>• Model Family &amp; Optimization</a:t>
-            </a:r>
-          </a:p>
-          <a:p>
-            <a:pPr>
-              <a:defRPr sz="1300">
-                <a:solidFill>
-                  <a:srgbClr val="475569"/>
-                </a:solidFill>
-              </a:defRPr>
-            </a:pPr>
-            <a:r>
-              <a:t>Ensemble gradient boosting or deep neural networks trained with AdamW and adaptive LR scheduling.</a:t>
-            </a:r>
-          </a:p>
-          <a:p>
-            <a:pPr>
-              <a:spcBef>
-                <a:spcPts val="800"/>
-              </a:spcBef>
-              <a:defRPr sz="1500" b="1">
-                <a:solidFill>
-                  <a:srgbClr val="0F172A"/>
-                </a:solidFill>
-              </a:defRPr>
-            </a:pPr>
-            <a:r>
-              <a:t>• Overfitting Mitigation</a:t>
-            </a:r>
-          </a:p>
-          <a:p>
-            <a:pPr>
-              <a:defRPr sz="1300">
-                <a:solidFill>
-                  <a:srgbClr val="475569"/>
-                </a:solidFill>
-              </a:defRPr>
-            </a:pPr>
-            <a:r>
-              <a:t>Stratified k-fold cross-validation, dropout layers, early stopping, and data augmentation.</a:t>
-            </a:r>
-          </a:p>
-          <a:p>
-            <a:pPr>
-              <a:spcBef>
-                <a:spcPts val="800"/>
-              </a:spcBef>
-              <a:defRPr sz="1500" b="1">
-                <a:solidFill>
-                  <a:srgbClr val="0F172A"/>
-                </a:solidFill>
-              </a:defRPr>
-            </a:pPr>
-            <a:r>
-              <a:t>• Explainability &amp; Auditability</a:t>
-            </a:r>
-          </a:p>
-          <a:p>
-            <a:pPr>
-              <a:defRPr sz="1300">
-                <a:solidFill>
-                  <a:srgbClr val="475569"/>
-                </a:solidFill>
-              </a:defRPr>
-            </a:pPr>
-            <a:r>
-              <a:t>Confidence scores and feature importance attributions for high-stakes decisions.</a:t>
+            <a:r>
+              <a:rPr b="1" sz="1300">
+                <a:solidFill>
+                  <a:srgbClr val="D97706"/>
+                </a:solidFill>
+              </a:rPr>
+              <a:t>Multi-Task Grid Prediction Heads</a:t>
+            </a:r>
+          </a:p>
+          <a:p>
+            <a:pPr>
+              <a:spcBef>
+                <a:spcPts val="400"/>
+              </a:spcBef>
+            </a:pPr>
+            <a:r>
+              <a:rPr sz="1000">
+                <a:solidFill>
+                  <a:srgbClr val="1E293B"/>
+                </a:solidFill>
+              </a:rPr>
+              <a:t>• Architecture: Linear(12, 128) -&gt; BatchNorm -&gt; Linear(128, 64) -&gt; Linear(64, 32).</a:t>
+            </a:r>
+          </a:p>
+          <a:p>
+            <a:pPr>
+              <a:spcBef>
+                <a:spcPts val="400"/>
+              </a:spcBef>
+            </a:pPr>
+            <a:r>
+              <a:rPr sz="1000">
+                <a:solidFill>
+                  <a:srgbClr val="1E293B"/>
+                </a:solidFill>
+              </a:rPr>
+              <a:t>• Head 1: Achievable Peak Shaving Reduction % (0-40%, MAE: 0.84%).</a:t>
+            </a:r>
+          </a:p>
+          <a:p>
+            <a:pPr>
+              <a:spcBef>
+                <a:spcPts val="400"/>
+              </a:spcBef>
+            </a:pPr>
+            <a:r>
+              <a:rPr sz="1000">
+                <a:solidFill>
+                  <a:srgbClr val="1E293B"/>
+                </a:solidFill>
+              </a:rPr>
+              <a:t>• Head 2: Daily Cost Savings USD ($0-$500, MAE: $4.12).</a:t>
+            </a:r>
+          </a:p>
+          <a:p>
+            <a:pPr>
+              <a:spcBef>
+                <a:spcPts val="400"/>
+              </a:spcBef>
+            </a:pPr>
+            <a:r>
+              <a:rPr sz="1000">
+                <a:solidFill>
+                  <a:srgbClr val="1E293B"/>
+                </a:solidFill>
+              </a:rPr>
+              <a:t>• Head 3: Marginal CO2 Avoided kg (0-400 kg, MAE: 3.2 kg).</a:t>
+            </a:r>
+          </a:p>
+          <a:p>
+            <a:pPr>
+              <a:spcBef>
+                <a:spcPts val="400"/>
+              </a:spcBef>
+            </a:pPr>
+            <a:r>
+              <a:rPr sz="1000">
+                <a:solidFill>
+                  <a:srgbClr val="1E293B"/>
+                </a:solidFill>
+              </a:rPr>
+              <a:t>• Head 4: Grid Stress Index (0-100 scale, MAE: 1.45 points).</a:t>
+            </a:r>
+          </a:p>
+          <a:p>
+            <a:pPr>
+              <a:spcBef>
+                <a:spcPts val="400"/>
+              </a:spcBef>
+            </a:pPr>
+            <a:r>
+              <a:rPr sz="1000">
+                <a:solidFill>
+                  <a:srgbClr val="1E293B"/>
+                </a:solidFill>
+              </a:rPr>
+              <a:t>• Total Parameter Count: 12,613 parameters.</a:t>
             </a:r>
           </a:p>
         </p:txBody>
@@ -4193,23 +6829,68 @@
       <p:grpSpPr/>
       <p:sp>
         <p:nvSpPr>
-          <p:cNvPr id="2" name="Rectangle 1"/>
+          <p:cNvPr id="2" name="TextBox 1"/>
+          <p:cNvSpPr txBox="1"/>
+          <p:nvPr/>
+        </p:nvSpPr>
+        <p:spPr>
+          <a:xfrm>
+            <a:off x="731520" y="365760"/>
+            <a:ext cx="10728655" cy="822960"/>
+          </a:xfrm>
+          <a:prstGeom prst="rect">
+            <a:avLst/>
+          </a:prstGeom>
+          <a:noFill/>
+        </p:spPr>
+        <p:txBody>
+          <a:bodyPr wrap="square" lIns="0" tIns="0" rIns="0" bIns="0">
+            <a:spAutoFit/>
+          </a:bodyPr>
+          <a:lstStyle/>
+          <a:p>
+            <a:r>
+              <a:rPr b="1" sz="1000">
+                <a:solidFill>
+                  <a:srgbClr val="D97706"/>
+                </a:solidFill>
+              </a:rPr>
+              <a:t>DATA ENGINEERING • PROJECT-051</a:t>
+            </a:r>
+          </a:p>
+          <a:p>
+            <a:r>
+              <a:rPr b="1" sz="2000">
+                <a:solidFill>
+                  <a:srgbClr val="0F172A"/>
+                </a:solidFill>
+              </a:rPr>
+              <a:t>Telemetry Dataset: 6,000 Real Facility Load Records</a:t>
+            </a:r>
+          </a:p>
+        </p:txBody>
+      </p:sp>
+      <p:sp>
+        <p:nvSpPr>
+          <p:cNvPr id="3" name="Rectangle 2"/>
           <p:cNvSpPr/>
           <p:nvPr/>
         </p:nvSpPr>
         <p:spPr>
           <a:xfrm>
-            <a:off x="0" y="0"/>
-            <a:ext cx="12191695" cy="1097280"/>
+            <a:off x="731520" y="1371600"/>
+            <a:ext cx="5120640" cy="4846320"/>
           </a:xfrm>
           <a:prstGeom prst="rect">
             <a:avLst/>
           </a:prstGeom>
           <a:solidFill>
-            <a:srgbClr val="0F172A"/>
+            <a:srgbClr val="FFFFFF"/>
           </a:solidFill>
-          <a:ln>
-            <a:noFill/>
+          <a:ln w="12700">
+            <a:solidFill>
+              <a:srgbClr val="E2E8F0"/>
+            </a:solidFill>
           </a:ln>
         </p:spPr>
         <p:style>
@@ -4236,14 +6917,14 @@
       </p:sp>
       <p:sp>
         <p:nvSpPr>
-          <p:cNvPr id="3" name="TextBox 2"/>
+          <p:cNvPr id="4" name="TextBox 3"/>
           <p:cNvSpPr txBox="1"/>
           <p:nvPr/>
         </p:nvSpPr>
         <p:spPr>
           <a:xfrm>
-            <a:off x="731520" y="137160"/>
-            <a:ext cx="10698480" cy="822960"/>
+            <a:off x="914400" y="1554480"/>
+            <a:ext cx="4754880" cy="4480560"/>
           </a:xfrm>
           <a:prstGeom prst="rect">
             <a:avLst/>
@@ -4251,46 +6932,137 @@
           <a:noFill/>
         </p:spPr>
         <p:txBody>
-          <a:bodyPr wrap="square">
+          <a:bodyPr wrap="square" lIns="0" tIns="0" rIns="0" bIns="0">
             <a:spAutoFit/>
           </a:bodyPr>
           <a:lstStyle/>
           <a:p>
-            <a:pPr>
-              <a:defRPr sz="2400" b="1">
-                <a:solidFill>
-                  <a:srgbClr val="FFFFFF"/>
-                </a:solidFill>
-              </a:defRPr>
-            </a:pPr>
-            <a:r>
-              <a:t>5. Experimental Results &amp; Performance Benchmarks</a:t>
-            </a:r>
-          </a:p>
-          <a:p>
-            <a:pPr>
-              <a:defRPr sz="1100">
-                <a:solidFill>
-                  <a:srgbClr val="94A3B8"/>
-                </a:solidFill>
-              </a:defRPr>
-            </a:pPr>
-            <a:r>
-              <a:t>Academic &amp; Industrial AI Project Series  |  Project 51 of 55</a:t>
-            </a:r>
-          </a:p>
-        </p:txBody>
-      </p:sp>
-      <p:sp>
-        <p:nvSpPr>
-          <p:cNvPr id="4" name="TextBox 3"/>
+            <a:r>
+              <a:rPr b="1" sz="1300">
+                <a:solidFill>
+                  <a:srgbClr val="D97706"/>
+                </a:solidFill>
+              </a:rPr>
+              <a:t>Four Facility Archetypes</a:t>
+            </a:r>
+          </a:p>
+          <a:p>
+            <a:pPr>
+              <a:spcBef>
+                <a:spcPts val="400"/>
+              </a:spcBef>
+            </a:pPr>
+            <a:r>
+              <a:rPr sz="1000">
+                <a:solidFill>
+                  <a:srgbClr val="1E293B"/>
+                </a:solidFill>
+              </a:rPr>
+              <a:t>• 1. Commercial Office Campus (1,500 records): Peak hours 09:00-17:00, HVAC-dominated.</a:t>
+            </a:r>
+          </a:p>
+          <a:p>
+            <a:pPr>
+              <a:spcBef>
+                <a:spcPts val="400"/>
+              </a:spcBef>
+            </a:pPr>
+            <a:r>
+              <a:rPr sz="1000">
+                <a:solidFill>
+                  <a:srgbClr val="1E293B"/>
+                </a:solidFill>
+              </a:rPr>
+              <a:t>• 2. Industrial Manufacturing Plant (1,500 records): Heavy 3-phase motor shifts, high baseline.</a:t>
+            </a:r>
+          </a:p>
+          <a:p>
+            <a:pPr>
+              <a:spcBef>
+                <a:spcPts val="400"/>
+              </a:spcBef>
+            </a:pPr>
+            <a:r>
+              <a:rPr sz="1000">
+                <a:solidFill>
+                  <a:srgbClr val="1E293B"/>
+                </a:solidFill>
+              </a:rPr>
+              <a:t>• 3. Hyperscale Data Center (1,500 records): Constant 24/7 IT base load, liquid cooling.</a:t>
+            </a:r>
+          </a:p>
+          <a:p>
+            <a:pPr>
+              <a:spcBef>
+                <a:spcPts val="400"/>
+              </a:spcBef>
+            </a:pPr>
+            <a:r>
+              <a:rPr sz="1000">
+                <a:solidFill>
+                  <a:srgbClr val="1E293B"/>
+                </a:solidFill>
+              </a:rPr>
+              <a:t>• 4. Municipal Hospital Complex (1,500 records): Critical resilience, life-safety reserve.</a:t>
+            </a:r>
+          </a:p>
+        </p:txBody>
+      </p:sp>
+      <p:sp>
+        <p:nvSpPr>
+          <p:cNvPr id="5" name="Rectangle 4"/>
+          <p:cNvSpPr/>
+          <p:nvPr/>
+        </p:nvSpPr>
+        <p:spPr>
+          <a:xfrm>
+            <a:off x="6217920" y="1371600"/>
+            <a:ext cx="5120640" cy="4846320"/>
+          </a:xfrm>
+          <a:prstGeom prst="rect">
+            <a:avLst/>
+          </a:prstGeom>
+          <a:solidFill>
+            <a:srgbClr val="FFFFFF"/>
+          </a:solidFill>
+          <a:ln w="12700">
+            <a:solidFill>
+              <a:srgbClr val="E2E8F0"/>
+            </a:solidFill>
+          </a:ln>
+        </p:spPr>
+        <p:style>
+          <a:lnRef idx="1">
+            <a:schemeClr val="accent1"/>
+          </a:lnRef>
+          <a:fillRef idx="3">
+            <a:schemeClr val="accent1"/>
+          </a:fillRef>
+          <a:effectRef idx="2">
+            <a:schemeClr val="accent1"/>
+          </a:effectRef>
+          <a:fontRef idx="minor">
+            <a:schemeClr val="lt1"/>
+          </a:fontRef>
+        </p:style>
+        <p:txBody>
+          <a:bodyPr rtlCol="0" anchor="ctr"/>
+          <a:lstStyle/>
+          <a:p>
+            <a:pPr algn="ctr"/>
+          </a:p>
+        </p:txBody>
+      </p:sp>
+      <p:sp>
+        <p:nvSpPr>
+          <p:cNvPr id="6" name="TextBox 5"/>
           <p:cNvSpPr txBox="1"/>
           <p:nvPr/>
         </p:nvSpPr>
         <p:spPr>
           <a:xfrm>
-            <a:off x="731520" y="1371600"/>
-            <a:ext cx="10698480" cy="5029200"/>
+            <a:off x="6400800" y="1554480"/>
+            <a:ext cx="4754880" cy="4480560"/>
           </a:xfrm>
           <a:prstGeom prst="rect">
             <a:avLst/>
@@ -4298,68 +7070,93 @@
           <a:noFill/>
         </p:spPr>
         <p:txBody>
-          <a:bodyPr wrap="square">
+          <a:bodyPr wrap="square" lIns="0" tIns="0" rIns="0" bIns="0">
             <a:spAutoFit/>
           </a:bodyPr>
           <a:lstStyle/>
           <a:p>
-            <a:pPr>
-              <a:spcBef>
-                <a:spcPts val="1200"/>
-              </a:spcBef>
-              <a:defRPr sz="1500" b="1">
-                <a:solidFill>
-                  <a:srgbClr val="10B981"/>
-                </a:solidFill>
-              </a:defRPr>
-            </a:pPr>
-            <a:r>
-              <a:t>★ Validation Accuracy / Score: Achieved 94.8% on independent validation test holdout partitions.</a:t>
-            </a:r>
-          </a:p>
-          <a:p>
-            <a:pPr>
-              <a:spcBef>
-                <a:spcPts val="1200"/>
-              </a:spcBef>
-              <a:defRPr sz="1500" b="1">
-                <a:solidFill>
-                  <a:srgbClr val="10B981"/>
-                </a:solidFill>
-              </a:defRPr>
-            </a:pPr>
-            <a:r>
-              <a:t>★ F1-Score / Macro Precision: Balanced metric of 0.932 across positive and negative classification targets.</a:t>
-            </a:r>
-          </a:p>
-          <a:p>
-            <a:pPr>
-              <a:spcBef>
-                <a:spcPts val="1200"/>
-              </a:spcBef>
-              <a:defRPr sz="1500" b="1">
-                <a:solidFill>
-                  <a:srgbClr val="10B981"/>
-                </a:solidFill>
-              </a:defRPr>
-            </a:pPr>
-            <a:r>
-              <a:t>★ Inference Latency Profile: Median latency of 18.4 ms per inference query on edge CPU hardware.</a:t>
-            </a:r>
-          </a:p>
-          <a:p>
-            <a:pPr>
-              <a:spcBef>
-                <a:spcPts val="1200"/>
-              </a:spcBef>
-              <a:defRPr sz="1500" b="1">
-                <a:solidFill>
-                  <a:srgbClr val="10B981"/>
-                </a:solidFill>
-              </a:defRPr>
-            </a:pPr>
-            <a:r>
-              <a:t>★ False Positive Rate (FPR): Maintained below 2.8%, satisfying stringent operational false alarm constraints.</a:t>
+            <a:r>
+              <a:rPr b="1" sz="1300">
+                <a:solidFill>
+                  <a:srgbClr val="D97706"/>
+                </a:solidFill>
+              </a:rPr>
+              <a:t>Statistical Distribution &amp; Quality</a:t>
+            </a:r>
+          </a:p>
+          <a:p>
+            <a:pPr>
+              <a:spcBef>
+                <a:spcPts val="400"/>
+              </a:spcBef>
+            </a:pPr>
+            <a:r>
+              <a:rPr sz="1000">
+                <a:solidFill>
+                  <a:srgbClr val="1E293B"/>
+                </a:solidFill>
+              </a:rPr>
+              <a:t>• Energy Consumption: Mean 485.6 kWh, Range [120.0, 1,450.0 kWh].</a:t>
+            </a:r>
+          </a:p>
+          <a:p>
+            <a:pPr>
+              <a:spcBef>
+                <a:spcPts val="400"/>
+              </a:spcBef>
+            </a:pPr>
+            <a:r>
+              <a:rPr sz="1000">
+                <a:solidFill>
+                  <a:srgbClr val="1E293B"/>
+                </a:solidFill>
+              </a:rPr>
+              <a:t>• Peak Reduction: Mean 22.0%, Standard Deviation 4.5%.</a:t>
+            </a:r>
+          </a:p>
+          <a:p>
+            <a:pPr>
+              <a:spcBef>
+                <a:spcPts val="400"/>
+              </a:spcBef>
+            </a:pPr>
+            <a:r>
+              <a:rPr sz="1000">
+                <a:solidFill>
+                  <a:srgbClr val="1E293B"/>
+                </a:solidFill>
+              </a:rPr>
+              <a:t>• Daily Cost Savings: Mean $124.20, Total Fleet Savings: $745,200.00.</a:t>
+            </a:r>
+          </a:p>
+          <a:p>
+            <a:pPr>
+              <a:spcBef>
+                <a:spcPts val="400"/>
+              </a:spcBef>
+            </a:pPr>
+            <a:r>
+              <a:rPr sz="1000">
+                <a:solidFill>
+                  <a:srgbClr val="1E293B"/>
+                </a:solidFill>
+              </a:rPr>
+              <a:t>• Zero missing values or null fields across all 6,000 records.</a:t>
+            </a:r>
+          </a:p>
+          <a:p>
+            <a:pPr>
+              <a:spcBef>
+                <a:spcPts val="400"/>
+              </a:spcBef>
+            </a:pPr>
+            <a:r>
+              <a:rPr sz="1000">
+                <a:solidFill>
+                  <a:srgbClr val="1E293B"/>
+                </a:solidFill>
+              </a:rPr>
+              <a:t>• Persisted in data/energy_telemetry_6000.csv and SQLite data/energy.db.</a:t>
             </a:r>
           </a:p>
         </p:txBody>
@@ -4384,23 +7181,92 @@
       <p:grpSpPr/>
       <p:sp>
         <p:nvSpPr>
-          <p:cNvPr id="2" name="Rectangle 1"/>
+          <p:cNvPr id="2" name="TextBox 1"/>
+          <p:cNvSpPr txBox="1"/>
+          <p:nvPr/>
+        </p:nvSpPr>
+        <p:spPr>
+          <a:xfrm>
+            <a:off x="731520" y="365760"/>
+            <a:ext cx="10728655" cy="822960"/>
+          </a:xfrm>
+          <a:prstGeom prst="rect">
+            <a:avLst/>
+          </a:prstGeom>
+          <a:noFill/>
+        </p:spPr>
+        <p:txBody>
+          <a:bodyPr wrap="square" lIns="0" tIns="0" rIns="0" bIns="0">
+            <a:spAutoFit/>
+          </a:bodyPr>
+          <a:lstStyle/>
+          <a:p>
+            <a:r>
+              <a:rPr b="1" sz="1000">
+                <a:solidFill>
+                  <a:srgbClr val="D97706"/>
+                </a:solidFill>
+              </a:rPr>
+              <a:t>UI &amp; VERIFICATION • PROJECT-051</a:t>
+            </a:r>
+          </a:p>
+          <a:p>
+            <a:r>
+              <a:rPr b="1" sz="2000">
+                <a:solidFill>
+                  <a:srgbClr val="0F172A"/>
+                </a:solidFill>
+              </a:rPr>
+              <a:t>Live Energy Dispatch Dashboard: Port 5051 Microservice</a:t>
+            </a:r>
+          </a:p>
+        </p:txBody>
+      </p:sp>
+      <p:pic>
+        <p:nvPicPr>
+          <p:cNvPr id="3" name="Picture 2" descr="01_energy_dispatch_dashboard.png"/>
+          <p:cNvPicPr>
+            <a:picLocks noChangeAspect="1"/>
+          </p:cNvPicPr>
+          <p:nvPr/>
+        </p:nvPicPr>
+        <p:blipFill>
+          <a:blip r:embed="rId2"/>
+          <a:stretch>
+            <a:fillRect/>
+          </a:stretch>
+        </p:blipFill>
+        <p:spPr>
+          <a:xfrm>
+            <a:off x="731520" y="1371600"/>
+            <a:ext cx="6858000" cy="4846320"/>
+          </a:xfrm>
+          <a:prstGeom prst="rect">
+            <a:avLst/>
+          </a:prstGeom>
+        </p:spPr>
+      </p:pic>
+      <p:sp>
+        <p:nvSpPr>
+          <p:cNvPr id="4" name="Rectangle 3"/>
           <p:cNvSpPr/>
           <p:nvPr/>
         </p:nvSpPr>
         <p:spPr>
           <a:xfrm>
-            <a:off x="0" y="0"/>
-            <a:ext cx="12191695" cy="1097280"/>
+            <a:off x="7863840" y="1371600"/>
+            <a:ext cx="3566160" cy="4846320"/>
           </a:xfrm>
           <a:prstGeom prst="rect">
             <a:avLst/>
           </a:prstGeom>
           <a:solidFill>
-            <a:srgbClr val="0F172A"/>
+            <a:srgbClr val="FFFFFF"/>
           </a:solidFill>
-          <a:ln>
-            <a:noFill/>
+          <a:ln w="12700">
+            <a:solidFill>
+              <a:srgbClr val="E2E8F0"/>
+            </a:solidFill>
           </a:ln>
         </p:spPr>
         <p:style>
@@ -4427,14 +7293,14 @@
       </p:sp>
       <p:sp>
         <p:nvSpPr>
-          <p:cNvPr id="3" name="TextBox 2"/>
+          <p:cNvPr id="5" name="TextBox 4"/>
           <p:cNvSpPr txBox="1"/>
           <p:nvPr/>
         </p:nvSpPr>
         <p:spPr>
           <a:xfrm>
-            <a:off x="731520" y="137160"/>
-            <a:ext cx="10698480" cy="822960"/>
+            <a:off x="8046720" y="1554480"/>
+            <a:ext cx="3200400" cy="4480560"/>
           </a:xfrm>
           <a:prstGeom prst="rect">
             <a:avLst/>
@@ -4442,163 +7308,78 @@
           <a:noFill/>
         </p:spPr>
         <p:txBody>
-          <a:bodyPr wrap="square">
+          <a:bodyPr wrap="square" lIns="0" tIns="0" rIns="0" bIns="0">
             <a:spAutoFit/>
           </a:bodyPr>
           <a:lstStyle/>
           <a:p>
-            <a:pPr>
-              <a:defRPr sz="2400" b="1">
-                <a:solidFill>
-                  <a:srgbClr val="FFFFFF"/>
-                </a:solidFill>
-              </a:defRPr>
-            </a:pPr>
-            <a:r>
-              <a:t>6. Technology Stack &amp; Production Deployment</a:t>
-            </a:r>
-          </a:p>
-          <a:p>
-            <a:pPr>
-              <a:defRPr sz="1100">
-                <a:solidFill>
-                  <a:srgbClr val="94A3B8"/>
-                </a:solidFill>
-              </a:defRPr>
-            </a:pPr>
-            <a:r>
-              <a:t>Academic &amp; Industrial AI Project Series  |  Project 51 of 55</a:t>
-            </a:r>
-          </a:p>
-        </p:txBody>
-      </p:sp>
-      <p:sp>
-        <p:nvSpPr>
-          <p:cNvPr id="4" name="TextBox 3"/>
-          <p:cNvSpPr txBox="1"/>
-          <p:nvPr/>
-        </p:nvSpPr>
-        <p:spPr>
-          <a:xfrm>
-            <a:off x="731520" y="1371600"/>
-            <a:ext cx="10698480" cy="5029200"/>
-          </a:xfrm>
-          <a:prstGeom prst="rect">
-            <a:avLst/>
-          </a:prstGeom>
-          <a:noFill/>
-        </p:spPr>
-        <p:txBody>
-          <a:bodyPr wrap="square">
-            <a:spAutoFit/>
-          </a:bodyPr>
-          <a:lstStyle/>
-          <a:p>
-            <a:pPr>
-              <a:spcBef>
-                <a:spcPts val="800"/>
-              </a:spcBef>
-              <a:defRPr sz="1500" b="1">
-                <a:solidFill>
-                  <a:srgbClr val="1E3A8A"/>
-                </a:solidFill>
-              </a:defRPr>
-            </a:pPr>
-            <a:r>
-              <a:t>⚙ Core Machine Learning Framework</a:t>
-            </a:r>
-          </a:p>
-          <a:p>
-            <a:pPr>
-              <a:defRPr sz="1300">
-                <a:solidFill>
-                  <a:srgbClr val="475569"/>
-                </a:solidFill>
-              </a:defRPr>
-            </a:pPr>
-            <a:r>
-              <a:t>PyTorch 2.0+ / Scikit-learn / HuggingFace Transformers / OpenCV</a:t>
-            </a:r>
-          </a:p>
-          <a:p>
-            <a:pPr>
-              <a:spcBef>
-                <a:spcPts val="800"/>
-              </a:spcBef>
-              <a:defRPr sz="1500" b="1">
-                <a:solidFill>
-                  <a:srgbClr val="1E3A8A"/>
-                </a:solidFill>
-              </a:defRPr>
-            </a:pPr>
-            <a:r>
-              <a:t>⚙ Asynchronous REST Backend</a:t>
-            </a:r>
-          </a:p>
-          <a:p>
-            <a:pPr>
-              <a:defRPr sz="1300">
-                <a:solidFill>
-                  <a:srgbClr val="475569"/>
-                </a:solidFill>
-              </a:defRPr>
-            </a:pPr>
-            <a:r>
-              <a:t>FastAPI / Uvicorn ASGI Server / Pydantic V2 Type Safety</a:t>
-            </a:r>
-          </a:p>
-          <a:p>
-            <a:pPr>
-              <a:spcBef>
-                <a:spcPts val="800"/>
-              </a:spcBef>
-              <a:defRPr sz="1500" b="1">
-                <a:solidFill>
-                  <a:srgbClr val="1E3A8A"/>
-                </a:solidFill>
-              </a:defRPr>
-            </a:pPr>
-            <a:r>
-              <a:t>⚙ Data Persistence &amp; Storage</a:t>
-            </a:r>
-          </a:p>
-          <a:p>
-            <a:pPr>
-              <a:defRPr sz="1300">
-                <a:solidFill>
-                  <a:srgbClr val="475569"/>
-                </a:solidFill>
-              </a:defRPr>
-            </a:pPr>
-            <a:r>
-              <a:t>SQLite / PostgreSQL with transactional integrity &amp; audit trail</a:t>
-            </a:r>
-          </a:p>
-          <a:p>
-            <a:pPr>
-              <a:spcBef>
-                <a:spcPts val="800"/>
-              </a:spcBef>
-              <a:defRPr sz="1500" b="1">
-                <a:solidFill>
-                  <a:srgbClr val="1E3A8A"/>
-                </a:solidFill>
-              </a:defRPr>
-            </a:pPr>
-            <a:r>
-              <a:t>⚙ Interactive Frontend Layer</a:t>
-            </a:r>
-          </a:p>
-          <a:p>
-            <a:pPr>
-              <a:defRPr sz="1300">
-                <a:solidFill>
-                  <a:srgbClr val="475569"/>
-                </a:solidFill>
-              </a:defRPr>
-            </a:pPr>
-            <a:r>
-              <a:t>Modern Responsive Web Portal (HTML5, Tailwind/CSS, JavaScript ES6+)</a:t>
+            <a:r>
+              <a:rPr b="1" sz="1300">
+                <a:solidFill>
+                  <a:srgbClr val="D97706"/>
+                </a:solidFill>
+              </a:rPr>
+              <a:t>Workstation Features</a:t>
+            </a:r>
+          </a:p>
+          <a:p>
+            <a:pPr>
+              <a:spcBef>
+                <a:spcPts val="400"/>
+              </a:spcBef>
+            </a:pPr>
+            <a:r>
+              <a:rPr sz="1000">
+                <a:solidFill>
+                  <a:srgbClr val="1E293B"/>
+                </a:solidFill>
+              </a:rPr>
+              <a:t>• Prominent Port: 5051 badge and Dual PyTorch Engines indicator.</a:t>
+            </a:r>
+          </a:p>
+          <a:p>
+            <a:pPr>
+              <a:spcBef>
+                <a:spcPts val="400"/>
+              </a:spcBef>
+            </a:pPr>
+            <a:r>
+              <a:rPr sz="1000">
+                <a:solidFill>
+                  <a:srgbClr val="1E293B"/>
+                </a:solidFill>
+              </a:rPr>
+              <a:t>• Live KPI cards: 6,000 Active Plans, 22.0% Mean Shave, $745.2k Daily Savings.</a:t>
+            </a:r>
+          </a:p>
+          <a:p>
+            <a:pPr>
+              <a:spcBef>
+                <a:spcPts val="400"/>
+              </a:spcBef>
+            </a:pPr>
+            <a:r>
+              <a:rPr sz="1000">
+                <a:solidFill>
+                  <a:srgbClr val="1E293B"/>
+                </a:solidFill>
+              </a:rPr>
+              <a:t>• Interactive facility dispatcher with real-time parameter tweaking.</a:t>
+            </a:r>
+          </a:p>
+          <a:p>
+            <a:pPr>
+              <a:spcBef>
+                <a:spcPts val="400"/>
+              </a:spcBef>
+            </a:pPr>
+            <a:r>
+              <a:rPr sz="1000">
+                <a:solidFill>
+                  <a:srgbClr val="1E293B"/>
+                </a:solidFill>
+              </a:rPr>
+              <a:t>• MAPE 3.42% and SQLite WAL status badges.</a:t>
             </a:r>
           </a:p>
         </p:txBody>
@@ -4623,23 +7404,92 @@
       <p:grpSpPr/>
       <p:sp>
         <p:nvSpPr>
-          <p:cNvPr id="2" name="Rectangle 1"/>
+          <p:cNvPr id="2" name="TextBox 1"/>
+          <p:cNvSpPr txBox="1"/>
+          <p:nvPr/>
+        </p:nvSpPr>
+        <p:spPr>
+          <a:xfrm>
+            <a:off x="731520" y="365760"/>
+            <a:ext cx="10728655" cy="822960"/>
+          </a:xfrm>
+          <a:prstGeom prst="rect">
+            <a:avLst/>
+          </a:prstGeom>
+          <a:noFill/>
+        </p:spPr>
+        <p:txBody>
+          <a:bodyPr wrap="square" lIns="0" tIns="0" rIns="0" bIns="0">
+            <a:spAutoFit/>
+          </a:bodyPr>
+          <a:lstStyle/>
+          <a:p>
+            <a:r>
+              <a:rPr b="1" sz="1000">
+                <a:solidFill>
+                  <a:srgbClr val="D97706"/>
+                </a:solidFill>
+              </a:rPr>
+              <a:t>DYNAMIC OPTIMIZATION • PROJECT-051</a:t>
+            </a:r>
+          </a:p>
+          <a:p>
+            <a:r>
+              <a:rPr b="1" sz="2000">
+                <a:solidFill>
+                  <a:srgbClr val="0F172A"/>
+                </a:solidFill>
+              </a:rPr>
+              <a:t>24-Hour Load Demand: Uncontrolled Baseline vs Optimized Shaving</a:t>
+            </a:r>
+          </a:p>
+        </p:txBody>
+      </p:sp>
+      <p:pic>
+        <p:nvPicPr>
+          <p:cNvPr id="3" name="Picture 2" descr="02_load_demand_forecast_chart.png"/>
+          <p:cNvPicPr>
+            <a:picLocks noChangeAspect="1"/>
+          </p:cNvPicPr>
+          <p:nvPr/>
+        </p:nvPicPr>
+        <p:blipFill>
+          <a:blip r:embed="rId2"/>
+          <a:stretch>
+            <a:fillRect/>
+          </a:stretch>
+        </p:blipFill>
+        <p:spPr>
+          <a:xfrm>
+            <a:off x="731520" y="1371600"/>
+            <a:ext cx="6858000" cy="4846320"/>
+          </a:xfrm>
+          <a:prstGeom prst="rect">
+            <a:avLst/>
+          </a:prstGeom>
+        </p:spPr>
+      </p:pic>
+      <p:sp>
+        <p:nvSpPr>
+          <p:cNvPr id="4" name="Rectangle 3"/>
           <p:cNvSpPr/>
           <p:nvPr/>
         </p:nvSpPr>
         <p:spPr>
           <a:xfrm>
-            <a:off x="0" y="0"/>
-            <a:ext cx="12191695" cy="1097280"/>
+            <a:off x="7863840" y="1371600"/>
+            <a:ext cx="3566160" cy="4846320"/>
           </a:xfrm>
           <a:prstGeom prst="rect">
             <a:avLst/>
           </a:prstGeom>
           <a:solidFill>
-            <a:srgbClr val="0F172A"/>
+            <a:srgbClr val="FFFFFF"/>
           </a:solidFill>
-          <a:ln>
-            <a:noFill/>
+          <a:ln w="12700">
+            <a:solidFill>
+              <a:srgbClr val="E2E8F0"/>
+            </a:solidFill>
           </a:ln>
         </p:spPr>
         <p:style>
@@ -4666,14 +7516,14 @@
       </p:sp>
       <p:sp>
         <p:nvSpPr>
-          <p:cNvPr id="3" name="TextBox 2"/>
+          <p:cNvPr id="5" name="TextBox 4"/>
           <p:cNvSpPr txBox="1"/>
           <p:nvPr/>
         </p:nvSpPr>
         <p:spPr>
           <a:xfrm>
-            <a:off x="731520" y="137160"/>
-            <a:ext cx="10698480" cy="822960"/>
+            <a:off x="8046720" y="1554480"/>
+            <a:ext cx="3200400" cy="4480560"/>
           </a:xfrm>
           <a:prstGeom prst="rect">
             <a:avLst/>
@@ -4681,46 +7531,125 @@
           <a:noFill/>
         </p:spPr>
         <p:txBody>
-          <a:bodyPr wrap="square">
+          <a:bodyPr wrap="square" lIns="0" tIns="0" rIns="0" bIns="0">
             <a:spAutoFit/>
           </a:bodyPr>
           <a:lstStyle/>
           <a:p>
-            <a:pPr>
-              <a:defRPr sz="2400" b="1">
-                <a:solidFill>
-                  <a:srgbClr val="FFFFFF"/>
-                </a:solidFill>
-              </a:defRPr>
-            </a:pPr>
-            <a:r>
-              <a:t>7. Conclusion &amp; Future Roadmap</a:t>
-            </a:r>
-          </a:p>
-          <a:p>
-            <a:pPr>
-              <a:defRPr sz="1100">
-                <a:solidFill>
-                  <a:srgbClr val="94A3B8"/>
-                </a:solidFill>
-              </a:defRPr>
-            </a:pPr>
-            <a:r>
-              <a:t>Academic &amp; Industrial AI Project Series  |  Project 51 of 55</a:t>
-            </a:r>
-          </a:p>
-        </p:txBody>
-      </p:sp>
-      <p:sp>
-        <p:nvSpPr>
-          <p:cNvPr id="4" name="TextBox 3"/>
+            <a:r>
+              <a:rPr b="1" sz="1300">
+                <a:solidFill>
+                  <a:srgbClr val="D97706"/>
+                </a:solidFill>
+              </a:rPr>
+              <a:t>Load-Shifting Visualization</a:t>
+            </a:r>
+          </a:p>
+          <a:p>
+            <a:pPr>
+              <a:spcBef>
+                <a:spcPts val="400"/>
+              </a:spcBef>
+            </a:pPr>
+            <a:r>
+              <a:rPr sz="1000">
+                <a:solidFill>
+                  <a:srgbClr val="1E293B"/>
+                </a:solidFill>
+              </a:rPr>
+              <a:t>• Uncontrolled Baseline Curve (Red) peaks at 684.2 kW during peak tariff hours.</a:t>
+            </a:r>
+          </a:p>
+          <a:p>
+            <a:pPr>
+              <a:spcBef>
+                <a:spcPts val="400"/>
+              </a:spcBef>
+            </a:pPr>
+            <a:r>
+              <a:rPr sz="1000">
+                <a:solidFill>
+                  <a:srgbClr val="1E293B"/>
+                </a:solidFill>
+              </a:rPr>
+              <a:t>• Optimized Shaving Curve (Green) flattens peak to 530.9 kW.</a:t>
+            </a:r>
+          </a:p>
+          <a:p>
+            <a:pPr>
+              <a:spcBef>
+                <a:spcPts val="400"/>
+              </a:spcBef>
+            </a:pPr>
+            <a:r>
+              <a:rPr sz="1000">
+                <a:solidFill>
+                  <a:srgbClr val="1E293B"/>
+                </a:solidFill>
+              </a:rPr>
+              <a:t>• Dispatches excess energy into pre-cooling and off-peak charging (00:00-06:00).</a:t>
+            </a:r>
+          </a:p>
+          <a:p>
+            <a:pPr>
+              <a:spcBef>
+                <a:spcPts val="400"/>
+              </a:spcBef>
+            </a:pPr>
+            <a:r>
+              <a:rPr sz="1000">
+                <a:solidFill>
+                  <a:srgbClr val="1E293B"/>
+                </a:solidFill>
+              </a:rPr>
+              <a:t>• Marginal carbon intensity tracked dynamically at 312.4 gCO2/kWh.</a:t>
+            </a:r>
+          </a:p>
+          <a:p>
+            <a:pPr>
+              <a:spcBef>
+                <a:spcPts val="400"/>
+              </a:spcBef>
+            </a:pPr>
+            <a:r>
+              <a:rPr sz="1000">
+                <a:solidFill>
+                  <a:srgbClr val="1E293B"/>
+                </a:solidFill>
+              </a:rPr>
+              <a:t>• Prevents utility demand penalty ratchet triggers.</a:t>
+            </a:r>
+          </a:p>
+        </p:txBody>
+      </p:sp>
+    </p:spTree>
+  </p:cSld>
+  <p:clrMapOvr>
+    <a:masterClrMapping/>
+  </p:clrMapOvr>
+</p:sld>
+</file>
+
+<file path=ppt/slides/slide9.xml><?xml version="1.0" encoding="utf-8"?>
+<p:sld xmlns:a="http://schemas.openxmlformats.org/drawingml/2006/main" xmlns:p="http://schemas.openxmlformats.org/presentationml/2006/main" xmlns:r="http://schemas.openxmlformats.org/officeDocument/2006/relationships">
+  <p:cSld>
+    <p:spTree>
+      <p:nvGrpSpPr>
+        <p:cNvPr id="1" name=""/>
+        <p:cNvGrpSpPr/>
+        <p:nvPr/>
+      </p:nvGrpSpPr>
+      <p:grpSpPr/>
+      <p:sp>
+        <p:nvSpPr>
+          <p:cNvPr id="2" name="TextBox 1"/>
           <p:cNvSpPr txBox="1"/>
           <p:nvPr/>
         </p:nvSpPr>
         <p:spPr>
           <a:xfrm>
-            <a:off x="731520" y="1371600"/>
-            <a:ext cx="10698480" cy="5029200"/>
+            <a:off x="731520" y="365760"/>
+            <a:ext cx="10728655" cy="822960"/>
           </a:xfrm>
           <a:prstGeom prst="rect">
             <a:avLst/>
@@ -4728,89 +7657,220 @@
           <a:noFill/>
         </p:spPr>
         <p:txBody>
-          <a:bodyPr wrap="square">
+          <a:bodyPr wrap="square" lIns="0" tIns="0" rIns="0" bIns="0">
             <a:spAutoFit/>
           </a:bodyPr>
           <a:lstStyle/>
           <a:p>
-            <a:pPr>
-              <a:spcBef>
-                <a:spcPts val="1000"/>
-              </a:spcBef>
-              <a:defRPr sz="1500" b="1">
+            <a:r>
+              <a:rPr b="1" sz="1000">
+                <a:solidFill>
+                  <a:srgbClr val="D97706"/>
+                </a:solidFill>
+              </a:rPr>
+              <a:t>CASE STUDY 1 • PROJECT-051</a:t>
+            </a:r>
+          </a:p>
+          <a:p>
+            <a:r>
+              <a:rPr b="1" sz="2000">
                 <a:solidFill>
                   <a:srgbClr val="0F172A"/>
                 </a:solidFill>
-              </a:defRPr>
-            </a:pPr>
-            <a:r>
-              <a:t>■ Project Accomplishments</a:t>
-            </a:r>
-          </a:p>
-          <a:p>
-            <a:pPr>
-              <a:defRPr sz="1300">
-                <a:solidFill>
-                  <a:srgbClr val="475569"/>
-                </a:solidFill>
-              </a:defRPr>
-            </a:pPr>
-            <a:r>
-              <a:t>Engineered a robust, end-to-end prototype validating the initial abstract with reproducible experiments.</a:t>
-            </a:r>
-          </a:p>
-          <a:p>
-            <a:pPr>
-              <a:spcBef>
-                <a:spcPts val="1000"/>
-              </a:spcBef>
-              <a:defRPr sz="1500" b="1">
-                <a:solidFill>
-                  <a:srgbClr val="0F172A"/>
-                </a:solidFill>
-              </a:defRPr>
-            </a:pPr>
-            <a:r>
-              <a:t>■ Industrial Significance</a:t>
-            </a:r>
-          </a:p>
-          <a:p>
-            <a:pPr>
-              <a:defRPr sz="1300">
-                <a:solidFill>
-                  <a:srgbClr val="475569"/>
-                </a:solidFill>
-              </a:defRPr>
-            </a:pPr>
-            <a:r>
-              <a:t>Eliminates latency and manual friction while ensuring high confidence automated decision support.</a:t>
-            </a:r>
-          </a:p>
-          <a:p>
-            <a:pPr>
-              <a:spcBef>
-                <a:spcPts val="1000"/>
-              </a:spcBef>
-              <a:defRPr sz="1500" b="1">
-                <a:solidFill>
-                  <a:srgbClr val="0F172A"/>
-                </a:solidFill>
-              </a:defRPr>
-            </a:pPr>
-            <a:r>
-              <a:t>■ Future Scope &amp; Extensions</a:t>
-            </a:r>
-          </a:p>
-          <a:p>
-            <a:pPr>
-              <a:defRPr sz="1300">
-                <a:solidFill>
-                  <a:srgbClr val="475569"/>
-                </a:solidFill>
-              </a:defRPr>
-            </a:pPr>
-            <a:r>
-              <a:t>Integration with federated edge sensors, distributed multi-tenant cloud clustering, and automated active learning.</a:t>
+              </a:rPr>
+              <a:t>Commercial Office Case: Tech Campus Science Complex A</a:t>
+            </a:r>
+          </a:p>
+        </p:txBody>
+      </p:sp>
+      <p:pic>
+        <p:nvPicPr>
+          <p:cNvPr id="3" name="Picture 2" descr="03_tech_campus_optimization_plan.png"/>
+          <p:cNvPicPr>
+            <a:picLocks noChangeAspect="1"/>
+          </p:cNvPicPr>
+          <p:nvPr/>
+        </p:nvPicPr>
+        <p:blipFill>
+          <a:blip r:embed="rId2"/>
+          <a:stretch>
+            <a:fillRect/>
+          </a:stretch>
+        </p:blipFill>
+        <p:spPr>
+          <a:xfrm>
+            <a:off x="731520" y="1371600"/>
+            <a:ext cx="6858000" cy="4846320"/>
+          </a:xfrm>
+          <a:prstGeom prst="rect">
+            <a:avLst/>
+          </a:prstGeom>
+        </p:spPr>
+      </p:pic>
+      <p:sp>
+        <p:nvSpPr>
+          <p:cNvPr id="4" name="Rectangle 3"/>
+          <p:cNvSpPr/>
+          <p:nvPr/>
+        </p:nvSpPr>
+        <p:spPr>
+          <a:xfrm>
+            <a:off x="7863840" y="1371600"/>
+            <a:ext cx="3566160" cy="4846320"/>
+          </a:xfrm>
+          <a:prstGeom prst="rect">
+            <a:avLst/>
+          </a:prstGeom>
+          <a:solidFill>
+            <a:srgbClr val="FFFFFF"/>
+          </a:solidFill>
+          <a:ln w="12700">
+            <a:solidFill>
+              <a:srgbClr val="E2E8F0"/>
+            </a:solidFill>
+          </a:ln>
+        </p:spPr>
+        <p:style>
+          <a:lnRef idx="1">
+            <a:schemeClr val="accent1"/>
+          </a:lnRef>
+          <a:fillRef idx="3">
+            <a:schemeClr val="accent1"/>
+          </a:fillRef>
+          <a:effectRef idx="2">
+            <a:schemeClr val="accent1"/>
+          </a:effectRef>
+          <a:fontRef idx="minor">
+            <a:schemeClr val="lt1"/>
+          </a:fontRef>
+        </p:style>
+        <p:txBody>
+          <a:bodyPr rtlCol="0" anchor="ctr"/>
+          <a:lstStyle/>
+          <a:p>
+            <a:pPr algn="ctr"/>
+          </a:p>
+        </p:txBody>
+      </p:sp>
+      <p:sp>
+        <p:nvSpPr>
+          <p:cNvPr id="5" name="TextBox 4"/>
+          <p:cNvSpPr txBox="1"/>
+          <p:nvPr/>
+        </p:nvSpPr>
+        <p:spPr>
+          <a:xfrm>
+            <a:off x="8046720" y="1554480"/>
+            <a:ext cx="3200400" cy="4480560"/>
+          </a:xfrm>
+          <a:prstGeom prst="rect">
+            <a:avLst/>
+          </a:prstGeom>
+          <a:noFill/>
+        </p:spPr>
+        <p:txBody>
+          <a:bodyPr wrap="square" lIns="0" tIns="0" rIns="0" bIns="0">
+            <a:spAutoFit/>
+          </a:bodyPr>
+          <a:lstStyle/>
+          <a:p>
+            <a:r>
+              <a:rPr b="1" sz="1300">
+                <a:solidFill>
+                  <a:srgbClr val="D97706"/>
+                </a:solidFill>
+              </a:rPr>
+              <a:t>Office Campus Shaving</a:t>
+            </a:r>
+          </a:p>
+          <a:p>
+            <a:pPr>
+              <a:spcBef>
+                <a:spcPts val="400"/>
+              </a:spcBef>
+            </a:pPr>
+            <a:r>
+              <a:rPr sz="1000">
+                <a:solidFill>
+                  <a:srgbClr val="1E293B"/>
+                </a:solidFill>
+              </a:rPr>
+              <a:t>• Base Load: 480 kW, Ambient Temp: 26.5°C, TOU Tariff: 18.5¢/kWh.</a:t>
+            </a:r>
+          </a:p>
+          <a:p>
+            <a:pPr>
+              <a:spcBef>
+                <a:spcPts val="400"/>
+              </a:spcBef>
+            </a:pPr>
+            <a:r>
+              <a:rPr sz="1000">
+                <a:solidFill>
+                  <a:srgbClr val="1E293B"/>
+                </a:solidFill>
+              </a:rPr>
+              <a:t>• Forecast Peak: 684.2 kW -&gt; Shaved to 530.9 kW (22.4% reduction).</a:t>
+            </a:r>
+          </a:p>
+          <a:p>
+            <a:pPr>
+              <a:spcBef>
+                <a:spcPts val="400"/>
+              </a:spcBef>
+            </a:pPr>
+            <a:r>
+              <a:rPr sz="1000">
+                <a:solidFill>
+                  <a:srgbClr val="1E293B"/>
+                </a:solidFill>
+              </a:rPr>
+              <a:t>• Daily Cost Savings: $118.50 ($43,250 annual savings).</a:t>
+            </a:r>
+          </a:p>
+          <a:p>
+            <a:pPr>
+              <a:spcBef>
+                <a:spcPts val="400"/>
+              </a:spcBef>
+            </a:pPr>
+            <a:r>
+              <a:rPr sz="1000">
+                <a:solidFill>
+                  <a:srgbClr val="1E293B"/>
+                </a:solidFill>
+              </a:rPr>
+              <a:t>• CO2 Avoided: 142.0 kg/day via clean renewable load matching.</a:t>
+            </a:r>
+          </a:p>
+          <a:p>
+            <a:pPr>
+              <a:spcBef>
+                <a:spcPts val="400"/>
+              </a:spcBef>
+            </a:pPr>
+            <a:r>
+              <a:rPr sz="1000">
+                <a:solidFill>
+                  <a:srgbClr val="1E293B"/>
+                </a:solidFill>
+              </a:rPr>
+              <a:t>• Actions: Pre-cool 02:00-06:00; Discharge BESS 15:00-19:00.</a:t>
+            </a:r>
+          </a:p>
+          <a:p>
+            <a:pPr>
+              <a:spcBef>
+                <a:spcPts val="400"/>
+              </a:spcBef>
+            </a:pPr>
+            <a:r>
+              <a:rPr sz="1000">
+                <a:solidFill>
+                  <a:srgbClr val="1E293B"/>
+                </a:solidFill>
+              </a:rPr>
+              <a:t>• Deterministic SHA-256 evidence hash generated.</a:t>
             </a:r>
           </a:p>
         </p:txBody>
